--- a/courses/ooad/sessions/s06.pptx
+++ b/courses/ooad/sessions/s06.pptx
@@ -1554,7 +1554,7 @@
             <a:pPr lvl="0"/>
             <a:r>
               <a:rPr lang="ko-KR" sz="1200"/>
-              <a:t>시스템 이벤트를 받는 객체를 정하는 원칙은 GRASP의 Controller로도 설명한다. 원칙의 이름과 대안은 "08. 변화 대응과 변이 설계"의 GRASP에서 함께 다룬다. 여기서는 판단 근거(규칙과 조정의 분리)만 본다.</a:t>
+              <a:t>시스템 이벤트를 받는 객체를 정하는 원칙은 GRASP의 컨트롤러(Controller)다. GRASP는 "07. 책임·협력·계약"의 「07. GRASP」에서 소개한다. 여기서는 판단 근거(규칙과 조정의 분리)만 본다.</a:t>
             </a:r>
           </a:p>
           <a:p>
@@ -2154,7 +2154,7 @@
             <a:pPr lvl="0"/>
             <a:r>
               <a:rPr lang="ko-KR" sz="1200"/>
-              <a:t>인용 근거: Craig Larman, *Applying UML and Patterns*, 2nd ed., Chapter 10 "Finding Conceptual Classes with Noun Phrase Identification" 원문 확인. "03. 정적 모델 — 도메인 개념과 관계"의 「44. 도메인 모델 — 초안」 앞의 개념 찾기와 같은 절의 다른 문장이다.</a:t>
+              <a:t>인용 근거: Craig Larman, *Applying UML and Patterns*, 3rd ed.(2004), §9.5 "Method 3: Finding Conceptual Classes with Noun Phrase Identification" 원문 확인. "03. 정적 모델 — 도메인 개념과 관계"의 「44. 도메인 모델 — 초안」 앞의 개념 찾기와 같은 절의 다른 문장이다.</a:t>
             </a:r>
           </a:p>
           <a:p>
@@ -3019,7 +3019,7 @@
             <a:pPr lvl="0"/>
             <a:r>
               <a:rPr lang="ko-KR" sz="1200"/>
-              <a:t>인용 근거: Craig Larman, *Applying UML and Patterns*, 3rd ed., 2004, p.272. 원서 본문은 미확인이다(www). 재인용처: Wikipedia "GRASP (object-oriented design)"의 인용문과 서지(3판 p.272)를 확인했다. 2판에는 이 문장이 없다.</a:t>
+              <a:t>인용 근거: Craig Larman, *Applying UML and Patterns*, 3rd ed.(2004), §17.1 "UML versus Design Principles" 원문 확인.</a:t>
             </a:r>
           </a:p>
           <a:p>
@@ -3169,14 +3169,14 @@
             <a:pPr lvl="0"/>
             <a:r>
               <a:rPr lang="ko-KR" sz="1200"/>
-              <a:t>인용 근거: Craig Larman, *Applying UML and Patterns*, 2nd ed., §10.9 "Lowering the Representational Gap" 원문 확인.</a:t>
+              <a:t>인용 근거: Craig Larman, *Applying UML and Patterns*, 3rd ed.(2004), §9.3 "Motivation: Why Create a Domain Model?"의 "Motivation: Lower Representational Gap with OO Modeling" 원문 확인.</a:t>
             </a:r>
           </a:p>
           <a:p>
             <a:pPr lvl="0"/>
             <a:r>
               <a:rPr lang="ko-KR" sz="1200"/>
-              <a:t>첫 인용의 "일부 요소(some things)"에 주목한다. 도메인 모델은 모든 설계 요소의 원본이 아니다. 주문 서비스·주문 저장소처럼 도메인 모델에 없는 설계 요소도 있다.</a:t>
+              <a:t>첫 인용의 "도메인 계층(domain layer)"에 주목한다. 도메인 모델에서 이름을 얻는 것은 도메인 계층의 클래스다. 주문 서비스·주문 저장소처럼 도메인 모델에 없는 설계 요소도 있다.</a:t>
             </a:r>
           </a:p>
           <a:p>
@@ -29576,7 +29576,7 @@
                 <a:latin typeface="맑은 고딕"/>
                 <a:ea typeface="맑은 고딕"/>
               </a:rPr>
-              <a:t>Craig Larman, 2002</a:t>
+              <a:t>Craig Larman, 2004</a:t>
             </a:r>
           </a:p>
         </p:txBody>
@@ -40018,7 +40018,7 @@
                 <a:latin typeface="맑은 고딕"/>
                 <a:ea typeface="맑은 고딕"/>
               </a:rPr>
-              <a:t>"the critical design tool for software development is a mind well educated in design principles. It is not UML or any other technology."</a:t>
+              <a:t>"The critical design tool for software development is a mind well educated in design principles. It is not the UML or any other technology."</a:t>
             </a:r>
             <a:r>
               <a:rPr sz="1000" b="0">
@@ -40038,7 +40038,7 @@
                 <a:latin typeface="맑은 고딕"/>
                 <a:ea typeface="맑은 고딕"/>
               </a:rPr>
-              <a:t>Craig Larman, 2004, www</a:t>
+              <a:t>Craig Larman, 2004</a:t>
             </a:r>
           </a:p>
         </p:txBody>
@@ -42058,7 +42058,7 @@
                 <a:latin typeface="맑은 고딕"/>
                 <a:ea typeface="맑은 고딕"/>
               </a:rPr>
-              <a:t>"도메인 모델은 도메인 어휘와 개념의 시각적 사전이며, 설계에서 일부 요소의 </a:t>
+              <a:t>"도메인 계층의 소프트웨어 클래스 이름은 </a:t>
             </a:r>
             <a:r>
               <a:rPr sz="1800" b="1">
@@ -42068,7 +42068,7 @@
                 <a:latin typeface="맑은 고딕"/>
                 <a:ea typeface="맑은 고딕"/>
               </a:rPr>
-              <a:t>이름을 지을 때 영감</a:t>
+              <a:t>도메인 모델의 이름에서 영감</a:t>
             </a:r>
             <a:r>
               <a:rPr sz="1800" b="0">
@@ -42078,7 +42078,7 @@
                 <a:latin typeface="맑은 고딕"/>
                 <a:ea typeface="맑은 고딕"/>
               </a:rPr>
-              <a:t>을 얻는 곳이다"</a:t>
+              <a:t>을 얻고, 객체는 도메인에 익숙한 정보와 책임을 갖게 한다"</a:t>
             </a:r>
             <a:r>
               <a:rPr sz="1000" b="0">
@@ -42098,7 +42098,7 @@
                 <a:latin typeface="맑은 고딕"/>
                 <a:ea typeface="맑은 고딕"/>
               </a:rPr>
-              <a:t>"The Domain Model provides a visual dictionary of the domain vocabulary and concepts from which to draw inspiration for the naming of some things in the software design."</a:t>
+              <a:t>"Use software class names in the domain layer inspired from names in the domain model, with objects having domain-familiar information and responsibilities."</a:t>
             </a:r>
             <a:r>
               <a:rPr sz="1000" b="0">
@@ -42118,7 +42118,7 @@
                 <a:latin typeface="맑은 고딕"/>
                 <a:ea typeface="맑은 고딕"/>
               </a:rPr>
-              <a:t>Craig Larman, 2002</a:t>
+              <a:t>Craig Larman, 2004</a:t>
             </a:r>
           </a:p>
           <a:p>
@@ -42181,7 +42181,7 @@
                 <a:latin typeface="맑은 고딕"/>
                 <a:ea typeface="맑은 고딕"/>
               </a:rPr>
-              <a:t>"A lowered representational gap is useful, but arguably secondary to the advantage of objects to support ease of change and extension, and their support to manage and hide complexity."</a:t>
+              <a:t>"A lowered representational gap is useful, but arguably secondary to the advantage objects have in supporting ease of change and extension, and managing and hiding complexity."</a:t>
             </a:r>
             <a:r>
               <a:rPr sz="1000" b="0">
@@ -42201,7 +42201,7 @@
                 <a:latin typeface="맑은 고딕"/>
                 <a:ea typeface="맑은 고딕"/>
               </a:rPr>
-              <a:t>Craig Larman, 2002</a:t>
+              <a:t>Craig Larman, 2004</a:t>
             </a:r>
           </a:p>
           <a:p>

--- a/courses/ooad/sessions/s06.pptx
+++ b/courses/ooad/sessions/s06.pptx
@@ -430,7 +430,7 @@
   </p:cSld>
   <p:clrMap bg1="lt1" tx1="dk1" bg2="lt2" tx2="dk2" accent1="accent1" accent2="accent2" accent3="accent3" accent4="accent4" accent5="accent5" accent6="accent6" hlink="hlink" folHlink="folHlink"/>
   <p:notesStyle>
-    <a:lvl1pPr marL="0" algn="l" defTabSz="914400" rtl="0" eaLnBrk="1" latinLnBrk="1" hangingPunct="1">
+    <a:lvl1pPr marL="0" algn="l" defTabSz="914400" rtl="0" eaLnBrk="1" latinLnBrk="0" hangingPunct="1">
       <a:defRPr sz="1200" kern="1200">
         <a:solidFill>
           <a:schemeClr val="tx1"/>
@@ -440,7 +440,7 @@
         <a:cs typeface="+mn-cs"/>
       </a:defRPr>
     </a:lvl1pPr>
-    <a:lvl2pPr marL="457200" algn="l" defTabSz="914400" rtl="0" eaLnBrk="1" latinLnBrk="1" hangingPunct="1">
+    <a:lvl2pPr marL="457200" algn="l" defTabSz="914400" rtl="0" eaLnBrk="1" latinLnBrk="0" hangingPunct="1">
       <a:defRPr sz="1200" kern="1200">
         <a:solidFill>
           <a:schemeClr val="tx1"/>
@@ -450,7 +450,7 @@
         <a:cs typeface="+mn-cs"/>
       </a:defRPr>
     </a:lvl2pPr>
-    <a:lvl3pPr marL="914400" algn="l" defTabSz="914400" rtl="0" eaLnBrk="1" latinLnBrk="1" hangingPunct="1">
+    <a:lvl3pPr marL="914400" algn="l" defTabSz="914400" rtl="0" eaLnBrk="1" latinLnBrk="0" hangingPunct="1">
       <a:defRPr sz="1200" kern="1200">
         <a:solidFill>
           <a:schemeClr val="tx1"/>
@@ -460,7 +460,7 @@
         <a:cs typeface="+mn-cs"/>
       </a:defRPr>
     </a:lvl3pPr>
-    <a:lvl4pPr marL="1371600" algn="l" defTabSz="914400" rtl="0" eaLnBrk="1" latinLnBrk="1" hangingPunct="1">
+    <a:lvl4pPr marL="1371600" algn="l" defTabSz="914400" rtl="0" eaLnBrk="1" latinLnBrk="0" hangingPunct="1">
       <a:defRPr sz="1200" kern="1200">
         <a:solidFill>
           <a:schemeClr val="tx1"/>
@@ -470,7 +470,7 @@
         <a:cs typeface="+mn-cs"/>
       </a:defRPr>
     </a:lvl4pPr>
-    <a:lvl5pPr marL="1828800" algn="l" defTabSz="914400" rtl="0" eaLnBrk="1" latinLnBrk="1" hangingPunct="1">
+    <a:lvl5pPr marL="1828800" algn="l" defTabSz="914400" rtl="0" eaLnBrk="1" latinLnBrk="0" hangingPunct="1">
       <a:defRPr sz="1200" kern="1200">
         <a:solidFill>
           <a:schemeClr val="tx1"/>
@@ -480,7 +480,7 @@
         <a:cs typeface="+mn-cs"/>
       </a:defRPr>
     </a:lvl5pPr>
-    <a:lvl6pPr marL="2286000" algn="l" defTabSz="914400" rtl="0" eaLnBrk="1" latinLnBrk="1" hangingPunct="1">
+    <a:lvl6pPr marL="2286000" algn="l" defTabSz="914400" rtl="0" eaLnBrk="1" latinLnBrk="0" hangingPunct="1">
       <a:defRPr sz="1200" kern="1200">
         <a:solidFill>
           <a:schemeClr val="tx1"/>
@@ -490,7 +490,7 @@
         <a:cs typeface="+mn-cs"/>
       </a:defRPr>
     </a:lvl6pPr>
-    <a:lvl7pPr marL="2743200" algn="l" defTabSz="914400" rtl="0" eaLnBrk="1" latinLnBrk="1" hangingPunct="1">
+    <a:lvl7pPr marL="2743200" algn="l" defTabSz="914400" rtl="0" eaLnBrk="1" latinLnBrk="0" hangingPunct="1">
       <a:defRPr sz="1200" kern="1200">
         <a:solidFill>
           <a:schemeClr val="tx1"/>
@@ -500,7 +500,7 @@
         <a:cs typeface="+mn-cs"/>
       </a:defRPr>
     </a:lvl7pPr>
-    <a:lvl8pPr marL="3200400" algn="l" defTabSz="914400" rtl="0" eaLnBrk="1" latinLnBrk="1" hangingPunct="1">
+    <a:lvl8pPr marL="3200400" algn="l" defTabSz="914400" rtl="0" eaLnBrk="1" latinLnBrk="0" hangingPunct="1">
       <a:defRPr sz="1200" kern="1200">
         <a:solidFill>
           <a:schemeClr val="tx1"/>
@@ -510,7 +510,7 @@
         <a:cs typeface="+mn-cs"/>
       </a:defRPr>
     </a:lvl8pPr>
-    <a:lvl9pPr marL="3657600" algn="l" defTabSz="914400" rtl="0" eaLnBrk="1" latinLnBrk="1" hangingPunct="1">
+    <a:lvl9pPr marL="3657600" algn="l" defTabSz="914400" rtl="0" eaLnBrk="1" latinLnBrk="0" hangingPunct="1">
       <a:defRPr sz="1200" kern="1200">
         <a:solidFill>
           <a:schemeClr val="tx1"/>
@@ -572,7 +572,7 @@
             <a:pPr lvl="0"/>
             <a:r>
               <a:rPr lang="ko-KR" sz="1200"/>
-              <a:t>주문 서비스(OrderService)와 주문 저장소(OrderRepository)는 새 설계 용어다. 용어집과 과정의 공통 전제에 더한다. 설계 도식과 코드는 "05. 구조적 경계와 의존성"의 「07. 설계의 이름」대로 용어집의 영문명을 쓴다.</a:t>
+              <a:t>주문 서비스(OrderService)와 주문 저장소(OrderRepository)는 새 설계 용어다. 용어집과 과정의 공통 전제에 더한다. 설계 도식과 코드는 "05. 구조적 경계와 의존성"의 「06. 설계의 이름」대로 용어집의 영문명을 쓴다.</a:t>
             </a:r>
           </a:p>
           <a:p>
@@ -729,7 +729,7 @@
             <a:pPr lvl="0"/>
             <a:r>
               <a:rPr lang="ko-KR" sz="1200"/>
-              <a:t>방향의 근거 — 취소 시퀀스에서 메시지는 주문 → 배송, 주문 → 결제로 흐른다. 패키지 의존(주문 → 결제·배송)도 같은 방향이다("05. 구조적 경계와 의존성"의 「24. 의존 방향」).</a:t>
+              <a:t>방향의 근거 — 취소 시퀀스에서 메시지는 주문 → 배송, 주문 → 결제로 흐른다. 패키지 의존(주문 → 결제·배송)도 같은 방향이다("05. 구조적 경계와 의존성"의 「12. 의존 방향」).</a:t>
             </a:r>
           </a:p>
           <a:p>
@@ -954,7 +954,7 @@
             <a:pPr lvl="0"/>
             <a:r>
               <a:rPr lang="ko-KR" sz="1200"/>
-              <a:t>계약의 원천은 "02. 요구 분석과 유스케이스"의 「45. 시스템 오퍼레이션과 계약」과 "04. 동적 모델 — 상호작용과 상태"의 「10. 계약의 정제」다.</a:t>
+              <a:t>계약의 원천은 "02. 요구 분석과 유스케이스"의 「44. 시스템 오퍼레이션과 계약」과 "04. 동적 모델 — 상호작용과 상태"의 「10. 계약의 정제」다.</a:t>
             </a:r>
           </a:p>
           <a:p>
@@ -1029,7 +1029,7 @@
             <a:pPr lvl="0"/>
             <a:r>
               <a:rPr lang="ko-KR" sz="1200"/>
-              <a:t>"05. 구조적 경계와 의존성"의 「40. 옮기기 코드」는 연동이 주문 객체를 직접 받았다. 설계에서는 외부가 아는 것은 주문 번호뿐이므로, 주문을 찾는 책임이 주문 서비스에 생긴다. 구조적 제약("연동은 통보를 전할 뿐")은 그대로다.</a:t>
+              <a:t>"05. 구조적 경계와 의존성"의 「24. 통보 변환 코드」는 연동이 주문 객체를 직접 받았다. 설계에서는 외부가 아는 것은 주문 번호뿐이므로, 주문을 찾는 책임이 주문 서비스에 생긴다. 구조적 제약("연동은 통보를 전할 뿐")은 그대로다.</a:t>
             </a:r>
           </a:p>
           <a:p>
@@ -1111,7 +1111,7 @@
             <a:pPr lvl="0"/>
             <a:r>
               <a:rPr lang="ko-KR" sz="1200"/>
-              <a:t>추적성은 "02. 요구 분석과 유스케이스"의 「56. 요구사항 추적」과 같은 생각이다. 판단에 필요한 관계만 추적하며, 모든 필드를 표로 옮기지 않는다.</a:t>
+              <a:t>추적성은 "02. 요구 분석과 유스케이스"의 「55. 요구사항 추적」과 같은 생각이다. 판단에 필요한 관계만 추적하며, 모든 필드를 표로 옮기지 않는다.</a:t>
             </a:r>
           </a:p>
         </p:txBody>
@@ -1697,7 +1697,7 @@
             <a:pPr lvl="0"/>
             <a:r>
               <a:rPr lang="ko-KR" sz="1200"/>
-              <a:t>제약의 원천은 "05. 구조적 경계와 의존성"의 「33. 구조적 제약」이다. 주문 서비스·주문 저장소는 주문 경계 안에 둔다 — 주문과 함께 바뀌기 때문이다.</a:t>
+              <a:t>제약의 원천은 "05. 구조적 경계와 의존성"의 「18. 구조적 제약」이다. 주문 서비스·주문 저장소는 주문 경계 안에 둔다 — 주문과 함께 바뀌기 때문이다.</a:t>
             </a:r>
           </a:p>
           <a:p>
@@ -1786,7 +1786,7 @@
             <a:pPr lvl="0"/>
             <a:r>
               <a:rPr lang="ko-KR" sz="1200"/>
-              <a:t>DeliverySystem·PaymentSystem은 여기서 외부 시스템이 아니라 업무 경계의 인터페이스다. 실제 호출은 연동이 실현한다(「23. 경계가 정하는 위치」).</a:t>
+              <a:t>DeliveryGateway·PaymentGateway은 여기서 외부 시스템이 아니라 업무 경계의 인터페이스다. 실제 호출은 연동이 실현한다(「23. 경계가 정하는 위치」).</a:t>
             </a:r>
           </a:p>
           <a:p>
@@ -1868,14 +1868,14 @@
             <a:pPr lvl="0"/>
             <a:r>
               <a:rPr lang="ko-KR" sz="1200"/>
-              <a:t>클래스·필드·메서드의 이름은 모두 용어집의 영문명이다. 타입 PascalCase, 필드·메서드 camelCase, 통보는 on으로 시작한다("05. 구조적 경계와 의존성"의 「07. 설계의 이름」).</a:t>
+              <a:t>클래스·필드·메서드의 이름은 모두 용어집의 영문명이다. 타입 PascalCase, 필드·메서드 camelCase, 통보는 on으로 시작한다("05. 구조적 경계와 의존성"의 「06. 설계의 이름」).</a:t>
             </a:r>
           </a:p>
           <a:p>
             <a:pPr lvl="0"/>
             <a:r>
               <a:rPr lang="ko-KR" sz="1200"/>
-              <a:t>환불·주문 상태 enum·값 타입의 세부와 연동의 실현(..|&gt;)은 읽기 쉽도록 생략했다. 실현은 "05. 구조적 경계와 의존성"의 「38. 패키지와 코드」가 보였다.</a:t>
+              <a:t>환불·주문 상태 enum·값 타입의 세부와 연동의 실현(..|&gt;)은 읽기 쉽도록 생략했다. 실현은 "05. 구조적 경계와 의존성"의 「22. 패키지와 코드」가 보였다.</a:t>
             </a:r>
           </a:p>
           <a:p>
@@ -2747,7 +2747,7 @@
             <a:pPr lvl="0"/>
             <a:r>
               <a:rPr lang="ko-KR" sz="1200"/>
-              <a:t>입력의 출처 — "03. 정적 모델 — 도메인 개념과 관계"의 「45. 도메인 모델 — 상세화」, "04. 동적 모델 — 상호작용과 상태"의 「26. 주문 취소 시퀀스」·「33. 주문 상태 기계」, "05. 구조적 경계와 의존성"의 「27. 주문 시스템 패키지 — 상세화」·「33. 구조적 제약」.</a:t>
+              <a:t>입력의 출처 — "03. 정적 모델 — 도메인 개념과 관계"의 「45. 도메인 모델 — 상세화」, "04. 동적 모델 — 상호작용과 상태"의 「26. 주문 취소 시퀀스」·「33. 주문 상태 기계」, "05. 구조적 경계와 의존성"의 「14. 주문 시스템 패키지 — 상세화」·「18. 구조적 제약」.</a:t>
             </a:r>
           </a:p>
           <a:p>
@@ -4072,7 +4072,7 @@
   <p:hf hdr="0" ftr="0" dt="0"/>
   <p:txStyles>
     <p:titleStyle>
-      <a:lvl1pPr algn="l" rtl="0" eaLnBrk="0" fontAlgn="base" latinLnBrk="1" hangingPunct="0">
+      <a:lvl1pPr algn="l" rtl="0" eaLnBrk="0" fontAlgn="base" latinLnBrk="0" hangingPunct="0">
         <a:spcBef>
           <a:spcPct val="0"/>
         </a:spcBef>
@@ -4088,7 +4088,7 @@
           <a:cs typeface="+mj-cs"/>
         </a:defRPr>
       </a:lvl1pPr>
-      <a:lvl2pPr algn="l" rtl="0" eaLnBrk="0" fontAlgn="base" latinLnBrk="1" hangingPunct="0">
+      <a:lvl2pPr algn="l" rtl="0" eaLnBrk="0" fontAlgn="base" latinLnBrk="0" hangingPunct="0">
         <a:spcBef>
           <a:spcPct val="0"/>
         </a:spcBef>
@@ -4103,7 +4103,7 @@
           <a:ea typeface="맑은 고딕" pitchFamily="50" charset="-127"/>
         </a:defRPr>
       </a:lvl2pPr>
-      <a:lvl3pPr algn="l" rtl="0" eaLnBrk="0" fontAlgn="base" latinLnBrk="1" hangingPunct="0">
+      <a:lvl3pPr algn="l" rtl="0" eaLnBrk="0" fontAlgn="base" latinLnBrk="0" hangingPunct="0">
         <a:spcBef>
           <a:spcPct val="0"/>
         </a:spcBef>
@@ -4118,7 +4118,7 @@
           <a:ea typeface="맑은 고딕" pitchFamily="50" charset="-127"/>
         </a:defRPr>
       </a:lvl3pPr>
-      <a:lvl4pPr algn="l" rtl="0" eaLnBrk="0" fontAlgn="base" latinLnBrk="1" hangingPunct="0">
+      <a:lvl4pPr algn="l" rtl="0" eaLnBrk="0" fontAlgn="base" latinLnBrk="0" hangingPunct="0">
         <a:spcBef>
           <a:spcPct val="0"/>
         </a:spcBef>
@@ -4133,7 +4133,7 @@
           <a:ea typeface="맑은 고딕" pitchFamily="50" charset="-127"/>
         </a:defRPr>
       </a:lvl4pPr>
-      <a:lvl5pPr algn="l" rtl="0" eaLnBrk="0" fontAlgn="base" latinLnBrk="1" hangingPunct="0">
+      <a:lvl5pPr algn="l" rtl="0" eaLnBrk="0" fontAlgn="base" latinLnBrk="0" hangingPunct="0">
         <a:spcBef>
           <a:spcPct val="0"/>
         </a:spcBef>
@@ -4148,7 +4148,7 @@
           <a:ea typeface="맑은 고딕" pitchFamily="50" charset="-127"/>
         </a:defRPr>
       </a:lvl5pPr>
-      <a:lvl6pPr marL="457200" algn="ctr" rtl="0" fontAlgn="base" latinLnBrk="1">
+      <a:lvl6pPr marL="457200" algn="ctr" rtl="0" fontAlgn="base" latinLnBrk="0">
         <a:spcBef>
           <a:spcPct val="0"/>
         </a:spcBef>
@@ -4163,7 +4163,7 @@
           <a:ea typeface="맑은 고딕" pitchFamily="50" charset="-127"/>
         </a:defRPr>
       </a:lvl6pPr>
-      <a:lvl7pPr marL="914400" algn="ctr" rtl="0" fontAlgn="base" latinLnBrk="1">
+      <a:lvl7pPr marL="914400" algn="ctr" rtl="0" fontAlgn="base" latinLnBrk="0">
         <a:spcBef>
           <a:spcPct val="0"/>
         </a:spcBef>
@@ -4178,7 +4178,7 @@
           <a:ea typeface="맑은 고딕" pitchFamily="50" charset="-127"/>
         </a:defRPr>
       </a:lvl7pPr>
-      <a:lvl8pPr marL="1371600" algn="ctr" rtl="0" fontAlgn="base" latinLnBrk="1">
+      <a:lvl8pPr marL="1371600" algn="ctr" rtl="0" fontAlgn="base" latinLnBrk="0">
         <a:spcBef>
           <a:spcPct val="0"/>
         </a:spcBef>
@@ -4193,7 +4193,7 @@
           <a:ea typeface="맑은 고딕" pitchFamily="50" charset="-127"/>
         </a:defRPr>
       </a:lvl8pPr>
-      <a:lvl9pPr marL="1828800" algn="ctr" rtl="0" fontAlgn="base" latinLnBrk="1">
+      <a:lvl9pPr marL="1828800" algn="ctr" rtl="0" fontAlgn="base" latinLnBrk="0">
         <a:spcBef>
           <a:spcPct val="0"/>
         </a:spcBef>
@@ -4210,7 +4210,7 @@
       </a:lvl9pPr>
     </p:titleStyle>
     <p:bodyStyle>
-      <a:lvl1pPr marL="342900" indent="-342900" algn="l" rtl="0" eaLnBrk="0" fontAlgn="base" latinLnBrk="1" hangingPunct="0">
+      <a:lvl1pPr marL="342900" indent="-342900" algn="l" rtl="0" eaLnBrk="0" fontAlgn="base" latinLnBrk="0" hangingPunct="0">
         <a:spcBef>
           <a:spcPct val="20000"/>
         </a:spcBef>
@@ -4228,7 +4228,7 @@
           <a:cs typeface="+mn-cs"/>
         </a:defRPr>
       </a:lvl1pPr>
-      <a:lvl2pPr marL="742950" indent="-285750" algn="l" rtl="0" eaLnBrk="0" fontAlgn="base" latinLnBrk="1" hangingPunct="0">
+      <a:lvl2pPr marL="742950" indent="-285750" algn="l" rtl="0" eaLnBrk="0" fontAlgn="base" latinLnBrk="0" hangingPunct="0">
         <a:spcBef>
           <a:spcPct val="20000"/>
         </a:spcBef>
@@ -4246,7 +4246,7 @@
           <a:cs typeface="+mn-cs"/>
         </a:defRPr>
       </a:lvl2pPr>
-      <a:lvl3pPr marL="1143000" indent="-228600" algn="l" rtl="0" eaLnBrk="0" fontAlgn="base" latinLnBrk="1" hangingPunct="0">
+      <a:lvl3pPr marL="1143000" indent="-228600" algn="l" rtl="0" eaLnBrk="0" fontAlgn="base" latinLnBrk="0" hangingPunct="0">
         <a:spcBef>
           <a:spcPct val="20000"/>
         </a:spcBef>
@@ -4264,7 +4264,7 @@
           <a:cs typeface="+mn-cs"/>
         </a:defRPr>
       </a:lvl3pPr>
-      <a:lvl4pPr marL="1600200" indent="-228600" algn="l" rtl="0" eaLnBrk="0" fontAlgn="base" latinLnBrk="1" hangingPunct="0">
+      <a:lvl4pPr marL="1600200" indent="-228600" algn="l" rtl="0" eaLnBrk="0" fontAlgn="base" latinLnBrk="0" hangingPunct="0">
         <a:spcBef>
           <a:spcPct val="20000"/>
         </a:spcBef>
@@ -4282,7 +4282,7 @@
           <a:cs typeface="+mn-cs"/>
         </a:defRPr>
       </a:lvl4pPr>
-      <a:lvl5pPr marL="2057400" indent="-228600" algn="l" rtl="0" eaLnBrk="0" fontAlgn="base" latinLnBrk="1" hangingPunct="0">
+      <a:lvl5pPr marL="2057400" indent="-228600" algn="l" rtl="0" eaLnBrk="0" fontAlgn="base" latinLnBrk="0" hangingPunct="0">
         <a:spcBef>
           <a:spcPct val="20000"/>
         </a:spcBef>
@@ -4300,7 +4300,7 @@
           <a:cs typeface="+mn-cs"/>
         </a:defRPr>
       </a:lvl5pPr>
-      <a:lvl6pPr marL="2514600" indent="-228600" algn="l" defTabSz="914400" rtl="0" eaLnBrk="1" latinLnBrk="1" hangingPunct="1">
+      <a:lvl6pPr marL="2514600" indent="-228600" algn="l" defTabSz="914400" rtl="0" eaLnBrk="1" latinLnBrk="0" hangingPunct="1">
         <a:spcBef>
           <a:spcPct val="20000"/>
         </a:spcBef>
@@ -4315,7 +4315,7 @@
           <a:cs typeface="+mn-cs"/>
         </a:defRPr>
       </a:lvl6pPr>
-      <a:lvl7pPr marL="2971800" indent="-228600" algn="l" defTabSz="914400" rtl="0" eaLnBrk="1" latinLnBrk="1" hangingPunct="1">
+      <a:lvl7pPr marL="2971800" indent="-228600" algn="l" defTabSz="914400" rtl="0" eaLnBrk="1" latinLnBrk="0" hangingPunct="1">
         <a:spcBef>
           <a:spcPct val="20000"/>
         </a:spcBef>
@@ -4330,7 +4330,7 @@
           <a:cs typeface="+mn-cs"/>
         </a:defRPr>
       </a:lvl7pPr>
-      <a:lvl8pPr marL="3429000" indent="-228600" algn="l" defTabSz="914400" rtl="0" eaLnBrk="1" latinLnBrk="1" hangingPunct="1">
+      <a:lvl8pPr marL="3429000" indent="-228600" algn="l" defTabSz="914400" rtl="0" eaLnBrk="1" latinLnBrk="0" hangingPunct="1">
         <a:spcBef>
           <a:spcPct val="20000"/>
         </a:spcBef>
@@ -4345,7 +4345,7 @@
           <a:cs typeface="+mn-cs"/>
         </a:defRPr>
       </a:lvl8pPr>
-      <a:lvl9pPr marL="3886200" indent="-228600" algn="l" defTabSz="914400" rtl="0" eaLnBrk="1" latinLnBrk="1" hangingPunct="1">
+      <a:lvl9pPr marL="3886200" indent="-228600" algn="l" defTabSz="914400" rtl="0" eaLnBrk="1" latinLnBrk="0" hangingPunct="1">
         <a:spcBef>
           <a:spcPct val="20000"/>
         </a:spcBef>
@@ -4365,7 +4365,7 @@
       <a:defPPr>
         <a:defRPr lang="ko-KR"/>
       </a:defPPr>
-      <a:lvl1pPr marL="0" algn="l" defTabSz="914400" rtl="0" eaLnBrk="1" latinLnBrk="1" hangingPunct="1">
+      <a:lvl1pPr marL="0" algn="l" defTabSz="914400" rtl="0" eaLnBrk="1" latinLnBrk="0" hangingPunct="1">
         <a:defRPr sz="1800" kern="1200">
           <a:solidFill>
             <a:schemeClr val="tx1"/>
@@ -4375,7 +4375,7 @@
           <a:cs typeface="+mn-cs"/>
         </a:defRPr>
       </a:lvl1pPr>
-      <a:lvl2pPr marL="457200" algn="l" defTabSz="914400" rtl="0" eaLnBrk="1" latinLnBrk="1" hangingPunct="1">
+      <a:lvl2pPr marL="457200" algn="l" defTabSz="914400" rtl="0" eaLnBrk="1" latinLnBrk="0" hangingPunct="1">
         <a:defRPr sz="1800" kern="1200">
           <a:solidFill>
             <a:schemeClr val="tx1"/>
@@ -4385,7 +4385,7 @@
           <a:cs typeface="+mn-cs"/>
         </a:defRPr>
       </a:lvl2pPr>
-      <a:lvl3pPr marL="914400" algn="l" defTabSz="914400" rtl="0" eaLnBrk="1" latinLnBrk="1" hangingPunct="1">
+      <a:lvl3pPr marL="914400" algn="l" defTabSz="914400" rtl="0" eaLnBrk="1" latinLnBrk="0" hangingPunct="1">
         <a:defRPr sz="1800" kern="1200">
           <a:solidFill>
             <a:schemeClr val="tx1"/>
@@ -4395,7 +4395,7 @@
           <a:cs typeface="+mn-cs"/>
         </a:defRPr>
       </a:lvl3pPr>
-      <a:lvl4pPr marL="1371600" algn="l" defTabSz="914400" rtl="0" eaLnBrk="1" latinLnBrk="1" hangingPunct="1">
+      <a:lvl4pPr marL="1371600" algn="l" defTabSz="914400" rtl="0" eaLnBrk="1" latinLnBrk="0" hangingPunct="1">
         <a:defRPr sz="1800" kern="1200">
           <a:solidFill>
             <a:schemeClr val="tx1"/>
@@ -4405,7 +4405,7 @@
           <a:cs typeface="+mn-cs"/>
         </a:defRPr>
       </a:lvl4pPr>
-      <a:lvl5pPr marL="1828800" algn="l" defTabSz="914400" rtl="0" eaLnBrk="1" latinLnBrk="1" hangingPunct="1">
+      <a:lvl5pPr marL="1828800" algn="l" defTabSz="914400" rtl="0" eaLnBrk="1" latinLnBrk="0" hangingPunct="1">
         <a:defRPr sz="1800" kern="1200">
           <a:solidFill>
             <a:schemeClr val="tx1"/>
@@ -4415,7 +4415,7 @@
           <a:cs typeface="+mn-cs"/>
         </a:defRPr>
       </a:lvl5pPr>
-      <a:lvl6pPr marL="2286000" algn="l" defTabSz="914400" rtl="0" eaLnBrk="1" latinLnBrk="1" hangingPunct="1">
+      <a:lvl6pPr marL="2286000" algn="l" defTabSz="914400" rtl="0" eaLnBrk="1" latinLnBrk="0" hangingPunct="1">
         <a:defRPr sz="1800" kern="1200">
           <a:solidFill>
             <a:schemeClr val="tx1"/>
@@ -4425,7 +4425,7 @@
           <a:cs typeface="+mn-cs"/>
         </a:defRPr>
       </a:lvl6pPr>
-      <a:lvl7pPr marL="2743200" algn="l" defTabSz="914400" rtl="0" eaLnBrk="1" latinLnBrk="1" hangingPunct="1">
+      <a:lvl7pPr marL="2743200" algn="l" defTabSz="914400" rtl="0" eaLnBrk="1" latinLnBrk="0" hangingPunct="1">
         <a:defRPr sz="1800" kern="1200">
           <a:solidFill>
             <a:schemeClr val="tx1"/>
@@ -4435,7 +4435,7 @@
           <a:cs typeface="+mn-cs"/>
         </a:defRPr>
       </a:lvl7pPr>
-      <a:lvl8pPr marL="3200400" algn="l" defTabSz="914400" rtl="0" eaLnBrk="1" latinLnBrk="1" hangingPunct="1">
+      <a:lvl8pPr marL="3200400" algn="l" defTabSz="914400" rtl="0" eaLnBrk="1" latinLnBrk="0" hangingPunct="1">
         <a:defRPr sz="1800" kern="1200">
           <a:solidFill>
             <a:schemeClr val="tx1"/>
@@ -4445,7 +4445,7 @@
           <a:cs typeface="+mn-cs"/>
         </a:defRPr>
       </a:lvl8pPr>
-      <a:lvl9pPr marL="3657600" algn="l" defTabSz="914400" rtl="0" eaLnBrk="1" latinLnBrk="1" hangingPunct="1">
+      <a:lvl9pPr marL="3657600" algn="l" defTabSz="914400" rtl="0" eaLnBrk="1" latinLnBrk="0" hangingPunct="1">
         <a:defRPr sz="1800" kern="1200">
           <a:solidFill>
             <a:schemeClr val="tx1"/>
@@ -11248,7 +11248,7 @@
                           <a:ea typeface="맑은 고딕" panose="020B0503020000020004" pitchFamily="34" charset="-127"/>
                           <a:cs typeface="맑은 고딕"/>
                         </a:rPr>
-                        <a:t>Delivery → DeliverySystem</a:t>
+                        <a:t>Delivery → DeliveryGateway</a:t>
                       </a:r>
                     </a:p>
                   </a:txBody>
@@ -11416,7 +11416,7 @@
                           <a:ea typeface="맑은 고딕" panose="020B0503020000020004" pitchFamily="34" charset="-127"/>
                           <a:cs typeface="맑은 고딕"/>
                         </a:rPr>
-                        <a:t>Payment → PaymentSystem</a:t>
+                        <a:t>Payment → PaymentGateway</a:t>
                       </a:r>
                     </a:p>
                   </a:txBody>
@@ -13794,7 +13794,7 @@
                           <a:ea typeface="맑은 고딕" panose="020B0503020000020004" pitchFamily="34" charset="-127"/>
                           <a:cs typeface="맑은 고딕"/>
                         </a:rPr>
-                        <a:t>PaymentSystem·DeliverySystem, 연동</a:t>
+                        <a:t>PaymentGateway·DeliveryGateway, 연동</a:t>
                       </a:r>
                     </a:p>
                   </a:txBody>
@@ -20239,7 +20239,7 @@
                 <a:latin typeface="맑은 고딕"/>
                 <a:ea typeface="맑은 고딕"/>
               </a:rPr>
-              <a:t>Eric Evans, 2015</a:t>
+              <a:t>[Evans 2015]</a:t>
             </a:r>
           </a:p>
           <a:p>
@@ -22967,8 +22967,8 @@
         </p:blipFill>
         <p:spPr>
           <a:xfrm>
-            <a:off x="2646485" y="1924332"/>
-            <a:ext cx="3851031" cy="4343400"/>
+            <a:off x="2606919" y="1924333"/>
+            <a:ext cx="3930162" cy="4343400"/>
           </a:xfrm>
           <a:prstGeom prst="rect">
             <a:avLst/>
@@ -23166,7 +23166,7 @@
           </p:nvPr>
         </p:nvGraphicFramePr>
         <p:xfrm>
-          <a:off x="1703895" y="1515110"/>
+          <a:off x="1703895" y="2191766"/>
           <a:ext cx="5722620" cy="3873500"/>
         </p:xfrm>
         <a:graphic>
@@ -23608,7 +23608,7 @@
                           <a:ea typeface="맑은 고딕" panose="020B0503020000020004" pitchFamily="34" charset="-127"/>
                           <a:cs typeface="맑은 고딕"/>
                         </a:rPr>
-                        <a:t>PaymentSystem·DeliverySystem은 업무 경계에</a:t>
+                        <a:t>PaymentGateway·DeliveryGateway은 업무 경계에</a:t>
                       </a:r>
                     </a:p>
                   </a:txBody>
@@ -23889,7 +23889,7 @@
         </p:nvSpPr>
         <p:spPr>
           <a:xfrm>
-            <a:off x="1033239" y="5678424"/>
+            <a:off x="1033239" y="6355080"/>
             <a:ext cx="6528540" cy="795528"/>
           </a:xfrm>
           <a:prstGeom prst="rect">
@@ -23968,6 +23968,47 @@
                 <a:cs typeface="+mn-cs"/>
               </a:rPr>
               <a:t>- 26 -</a:t>
+            </a:r>
+          </a:p>
+        </p:txBody>
+      </p:sp>
+      <p:sp>
+        <p:nvSpPr>
+          <p:cNvPr id="14" name="TextBox 12">
+            <a:extLst>
+              <a:ext uri="{FF2B5EF4-FFF2-40B4-BE49-F238E27FC236}">
+                <a16:creationId xmlns:a16="http://schemas.microsoft.com/office/drawing/2014/main" id="{654EDDB4-901F-3D48-A715-17D163E8A7AC}"/>
+              </a:ext>
+            </a:extLst>
+          </p:cNvPr>
+          <p:cNvSpPr txBox="1"/>
+          <p:nvPr/>
+        </p:nvSpPr>
+        <p:spPr>
+          <a:xfrm>
+            <a:off x="365760" y="960120"/>
+            <a:ext cx="8412480" cy="676656"/>
+          </a:xfrm>
+          <a:prstGeom prst="rect">
+            <a:avLst/>
+          </a:prstGeom>
+          <a:noFill/>
+        </p:spPr>
+        <p:txBody>
+          <a:bodyPr wrap="square">
+            <a:spAutoFit/>
+          </a:bodyPr>
+          <a:lstStyle/>
+          <a:p>
+            <a:r>
+              <a:rPr sz="1800" b="0" i="1">
+                <a:solidFill>
+                  <a:srgbClr val="000000"/>
+                </a:solidFill>
+                <a:latin typeface="맑은 고딕"/>
+                <a:ea typeface="맑은 고딕"/>
+              </a:rPr>
+              <a:t>책임을 어디에 둘지는 구조적 제약이 먼저 제한한다. 약속은 업무 경계에, 외부 형식은 연동에, 상태 변경은 주문에 둔다.</a:t>
             </a:r>
           </a:p>
         </p:txBody>
@@ -24661,7 +24702,7 @@
                 <a:latin typeface="맑은 고딕"/>
                 <a:ea typeface="맑은 고딕"/>
               </a:rPr>
-              <a:t>DeliverySystem</a:t>
+              <a:t>DeliveryGateway</a:t>
             </a:r>
             <a:r>
               <a:rPr sz="1800" b="0">
@@ -24681,7 +24722,7 @@
                 <a:latin typeface="맑은 고딕"/>
                 <a:ea typeface="맑은 고딕"/>
               </a:rPr>
-              <a:t>PaymentSystem</a:t>
+              <a:t>PaymentGateway</a:t>
             </a:r>
             <a:r>
               <a:rPr sz="1800" b="0">
@@ -24817,8 +24858,8 @@
         </p:blipFill>
         <p:spPr>
           <a:xfrm>
-            <a:off x="981852" y="2100036"/>
-            <a:ext cx="7166708" cy="2943958"/>
+            <a:off x="968175" y="2100036"/>
+            <a:ext cx="7194062" cy="2943958"/>
           </a:xfrm>
           <a:prstGeom prst="rect">
             <a:avLst/>
@@ -25371,7 +25412,7 @@
           </p:nvPr>
         </p:nvGraphicFramePr>
         <p:xfrm>
-          <a:off x="2208086" y="1515110"/>
+          <a:off x="2208086" y="2191766"/>
           <a:ext cx="4714240" cy="3873500"/>
         </p:xfrm>
         <a:graphic>
@@ -26277,7 +26318,7 @@
         </p:nvSpPr>
         <p:spPr>
           <a:xfrm>
-            <a:off x="1033239" y="5678424"/>
+            <a:off x="1033239" y="6355080"/>
             <a:ext cx="6528540" cy="795528"/>
           </a:xfrm>
           <a:prstGeom prst="rect">
@@ -26356,6 +26397,47 @@
                 <a:cs typeface="+mn-cs"/>
               </a:rPr>
               <a:t>- 29 -</a:t>
+            </a:r>
+          </a:p>
+        </p:txBody>
+      </p:sp>
+      <p:sp>
+        <p:nvSpPr>
+          <p:cNvPr id="14" name="TextBox 12">
+            <a:extLst>
+              <a:ext uri="{FF2B5EF4-FFF2-40B4-BE49-F238E27FC236}">
+                <a16:creationId xmlns:a16="http://schemas.microsoft.com/office/drawing/2014/main" id="{654EDDB4-901F-3D48-A715-17D163E8A7AC}"/>
+              </a:ext>
+            </a:extLst>
+          </p:cNvPr>
+          <p:cNvSpPr txBox="1"/>
+          <p:nvPr/>
+        </p:nvSpPr>
+        <p:spPr>
+          <a:xfrm>
+            <a:off x="365760" y="960120"/>
+            <a:ext cx="8412480" cy="676656"/>
+          </a:xfrm>
+          <a:prstGeom prst="rect">
+            <a:avLst/>
+          </a:prstGeom>
+          <a:noFill/>
+        </p:spPr>
+        <p:txBody>
+          <a:bodyPr wrap="square">
+            <a:spAutoFit/>
+          </a:bodyPr>
+          <a:lstStyle/>
+          <a:p>
+            <a:r>
+              <a:rPr sz="1800" b="0" i="1">
+                <a:solidFill>
+                  <a:srgbClr val="000000"/>
+                </a:solidFill>
+                <a:latin typeface="맑은 고딕"/>
+                <a:ea typeface="맑은 고딕"/>
+              </a:rPr>
+              <a:t>설계 클래스 다이어그램(Design Class Diagram, DCD)은 필드의 타입, 참조의 방향, 책임인 메서드, 인터페이스와 그 실현을 보인다.</a:t>
             </a:r>
           </a:p>
         </p:txBody>
@@ -29576,7 +29658,7 @@
                 <a:latin typeface="맑은 고딕"/>
                 <a:ea typeface="맑은 고딕"/>
               </a:rPr>
-              <a:t>Craig Larman, 2004</a:t>
+              <a:t>[Larman 2004]</a:t>
             </a:r>
           </a:p>
         </p:txBody>
@@ -33733,8 +33815,8 @@
           </p:nvPr>
         </p:nvGraphicFramePr>
         <p:xfrm>
-          <a:off x="643446" y="1842998"/>
-          <a:ext cx="7843520" cy="3873500"/>
+          <a:off x="559626" y="1842998"/>
+          <a:ext cx="8011160" cy="3873500"/>
         </p:xfrm>
         <a:graphic>
           <a:graphicData uri="http://schemas.openxmlformats.org/drawingml/2006/table">
@@ -33742,7 +33824,7 @@
               <a:tblPr/>
               <a:tblGrid>
                 <a:gridCol w="2037080"/>
-                <a:gridCol w="3098800"/>
+                <a:gridCol w="3266440"/>
                 <a:gridCol w="2707640"/>
               </a:tblGrid>
               <a:tr h="288000">
@@ -35870,7 +35952,7 @@
                           <a:ea typeface="맑은 고딕" panose="020B0503020000020004" pitchFamily="34" charset="-127"/>
                           <a:cs typeface="맑은 고딕"/>
                         </a:rPr>
-                        <a:t>PaymentSystem·DeliverySystem, 연동</a:t>
+                        <a:t>PaymentGateway·DeliveryGateway, 연동</a:t>
                       </a:r>
                     </a:p>
                   </a:txBody>
@@ -38388,6 +38470,27 @@
             </a:r>
           </a:p>
           <a:p>
+            <a:pPr marL="342900" indent="0">
+              <a:spcBef>
+                <a:spcPts val="600"/>
+              </a:spcBef>
+              <a:spcAft>
+                <a:spcPts val="600"/>
+              </a:spcAft>
+              <a:buNone/>
+            </a:pPr>
+            <a:r>
+              <a:rPr sz="1800" b="1">
+                <a:solidFill>
+                  <a:srgbClr val="000000"/>
+                </a:solidFill>
+                <a:latin typeface="맑은 고딕"/>
+                <a:ea typeface="맑은 고딕"/>
+              </a:rPr>
+              <a:t>분석에서 설계로의 핵심</a:t>
+            </a:r>
+          </a:p>
+          <a:p>
             <a:pPr lvl="2" marL="723900" indent="-368300">
               <a:spcBef>
                 <a:spcPts val="600"/>
@@ -38400,6 +38503,16 @@
               <a:buChar char=""/>
             </a:pPr>
             <a:r>
+              <a:rPr sz="1800" b="1">
+                <a:solidFill>
+                  <a:srgbClr val="000000"/>
+                </a:solidFill>
+                <a:latin typeface="맑은 고딕"/>
+                <a:ea typeface="맑은 고딕"/>
+              </a:rPr>
+              <a:t>판단</a:t>
+            </a:r>
+            <a:r>
               <a:rPr sz="1800" b="0">
                 <a:solidFill>
                   <a:srgbClr val="000000"/>
@@ -38407,30 +38520,7 @@
                 <a:latin typeface="맑은 고딕"/>
                 <a:ea typeface="맑은 고딕"/>
               </a:rPr>
-              <a:t>분석에서 설계로의 핵심</a:t>
-            </a:r>
-          </a:p>
-          <a:p>
-            <a:pPr lvl="3" marL="1077913" indent="-354013">
-              <a:spcBef>
-                <a:spcPts val="600"/>
-              </a:spcBef>
-              <a:spcAft>
-                <a:spcPts val="600"/>
-              </a:spcAft>
-              <a:buSzPct val="90000"/>
-              <a:buFont typeface="Wingdings" pitchFamily="2" charset="2"/>
-              <a:buChar char=""/>
-            </a:pPr>
-            <a:r>
-              <a:rPr sz="1600" b="1">
-                <a:solidFill>
-                  <a:srgbClr val="000000"/>
-                </a:solidFill>
-                <a:latin typeface="맑은 고딕"/>
-                <a:ea typeface="맑은 고딕"/>
-              </a:rPr>
-              <a:t>판단</a:t>
+              <a:t> —</a:t>
             </a:r>
             <a:r>
               <a:rPr sz="1600" b="0">
@@ -38440,275 +38530,7 @@
                 <a:latin typeface="맑은 고딕"/>
                 <a:ea typeface="맑은 고딕"/>
               </a:rPr>
-              <a:t> —</a:t>
-            </a:r>
-            <a:r>
-              <a:rPr sz="1400" b="0">
-                <a:solidFill>
-                  <a:srgbClr val="000000"/>
-                </a:solidFill>
-                <a:latin typeface="맑은 고딕"/>
-                <a:ea typeface="맑은 고딕"/>
-              </a:rPr>
               <a:t> 의미는 보존하고 형태는 책임·경계·협력으로 다시 결정한다</a:t>
-            </a:r>
-          </a:p>
-          <a:p>
-            <a:pPr lvl="3" marL="1077913" indent="-354013">
-              <a:spcBef>
-                <a:spcPts val="600"/>
-              </a:spcBef>
-              <a:spcAft>
-                <a:spcPts val="600"/>
-              </a:spcAft>
-              <a:buSzPct val="90000"/>
-              <a:buFont typeface="Wingdings" pitchFamily="2" charset="2"/>
-              <a:buChar char=""/>
-            </a:pPr>
-            <a:r>
-              <a:rPr sz="1600" b="1">
-                <a:solidFill>
-                  <a:srgbClr val="000000"/>
-                </a:solidFill>
-                <a:latin typeface="맑은 고딕"/>
-                <a:ea typeface="맑은 고딕"/>
-              </a:rPr>
-              <a:t>대응</a:t>
-            </a:r>
-            <a:r>
-              <a:rPr sz="1600" b="0">
-                <a:solidFill>
-                  <a:srgbClr val="000000"/>
-                </a:solidFill>
-                <a:latin typeface="맑은 고딕"/>
-                <a:ea typeface="맑은 고딕"/>
-              </a:rPr>
-              <a:t> —</a:t>
-            </a:r>
-            <a:r>
-              <a:rPr sz="1400" b="0">
-                <a:solidFill>
-                  <a:srgbClr val="000000"/>
-                </a:solidFill>
-                <a:latin typeface="맑은 고딕"/>
-                <a:ea typeface="맑은 고딕"/>
-              </a:rPr>
-              <a:t> 1:1이 아니다. 나뉘고, 합쳐지고, 설계에만 있는 요소가 생긴다</a:t>
-            </a:r>
-          </a:p>
-          <a:p>
-            <a:pPr lvl="3" marL="1077913" indent="-354013">
-              <a:spcBef>
-                <a:spcPts val="600"/>
-              </a:spcBef>
-              <a:spcAft>
-                <a:spcPts val="600"/>
-              </a:spcAft>
-              <a:buSzPct val="90000"/>
-              <a:buFont typeface="Wingdings" pitchFamily="2" charset="2"/>
-              <a:buChar char=""/>
-            </a:pPr>
-            <a:r>
-              <a:rPr sz="1600" b="1">
-                <a:solidFill>
-                  <a:srgbClr val="000000"/>
-                </a:solidFill>
-                <a:latin typeface="맑은 고딕"/>
-                <a:ea typeface="맑은 고딕"/>
-              </a:rPr>
-              <a:t>의미 보존</a:t>
-            </a:r>
-            <a:r>
-              <a:rPr sz="1600" b="0">
-                <a:solidFill>
-                  <a:srgbClr val="000000"/>
-                </a:solidFill>
-                <a:latin typeface="맑은 고딕"/>
-                <a:ea typeface="맑은 고딕"/>
-              </a:rPr>
-              <a:t> —</a:t>
-            </a:r>
-            <a:r>
-              <a:rPr sz="1400" b="0">
-                <a:solidFill>
-                  <a:srgbClr val="000000"/>
-                </a:solidFill>
-                <a:latin typeface="맑은 고딕"/>
-                <a:ea typeface="맑은 고딕"/>
-              </a:rPr>
-              <a:t> 용어·값·규칙·다중성·계약·사건의 순서를 테스트로 확인한다</a:t>
-            </a:r>
-          </a:p>
-          <a:p>
-            <a:pPr lvl="3" marL="1077913" indent="-354013">
-              <a:spcBef>
-                <a:spcPts val="600"/>
-              </a:spcBef>
-              <a:spcAft>
-                <a:spcPts val="600"/>
-              </a:spcAft>
-              <a:buSzPct val="90000"/>
-              <a:buFont typeface="Wingdings" pitchFamily="2" charset="2"/>
-              <a:buChar char=""/>
-            </a:pPr>
-            <a:r>
-              <a:rPr sz="1600" b="1">
-                <a:solidFill>
-                  <a:srgbClr val="000000"/>
-                </a:solidFill>
-                <a:latin typeface="맑은 고딕"/>
-                <a:ea typeface="맑은 고딕"/>
-              </a:rPr>
-              <a:t>설계의 이름</a:t>
-            </a:r>
-            <a:r>
-              <a:rPr sz="1600" b="0">
-                <a:solidFill>
-                  <a:srgbClr val="000000"/>
-                </a:solidFill>
-                <a:latin typeface="맑은 고딕"/>
-                <a:ea typeface="맑은 고딕"/>
-              </a:rPr>
-              <a:t> —</a:t>
-            </a:r>
-            <a:r>
-              <a:rPr sz="1400" b="0">
-                <a:solidFill>
-                  <a:srgbClr val="000000"/>
-                </a:solidFill>
-                <a:latin typeface="맑은 고딕"/>
-                <a:ea typeface="맑은 고딕"/>
-              </a:rPr>
-              <a:t> 분석은 한글 용어, 설계는 용어집의 영문명. 새 설계 용어는 용어집에 먼저</a:t>
-            </a:r>
-          </a:p>
-          <a:p>
-            <a:pPr lvl="3" marL="1077913" indent="-354013">
-              <a:spcBef>
-                <a:spcPts val="600"/>
-              </a:spcBef>
-              <a:spcAft>
-                <a:spcPts val="600"/>
-              </a:spcAft>
-              <a:buSzPct val="90000"/>
-              <a:buFont typeface="Wingdings" pitchFamily="2" charset="2"/>
-              <a:buChar char=""/>
-            </a:pPr>
-            <a:r>
-              <a:rPr sz="1600" b="1">
-                <a:solidFill>
-                  <a:srgbClr val="000000"/>
-                </a:solidFill>
-                <a:latin typeface="맑은 고딕"/>
-                <a:ea typeface="맑은 고딕"/>
-              </a:rPr>
-              <a:t>초기 설계</a:t>
-            </a:r>
-            <a:r>
-              <a:rPr sz="1600" b="0">
-                <a:solidFill>
-                  <a:srgbClr val="000000"/>
-                </a:solidFill>
-                <a:latin typeface="맑은 고딕"/>
-                <a:ea typeface="맑은 고딕"/>
-              </a:rPr>
-              <a:t> —</a:t>
-            </a:r>
-            <a:r>
-              <a:rPr sz="1400" b="0">
-                <a:solidFill>
-                  <a:srgbClr val="000000"/>
-                </a:solidFill>
-                <a:latin typeface="맑은 고딕"/>
-                <a:ea typeface="맑은 고딕"/>
-              </a:rPr>
-              <a:t> 시스템 이벤트를 받는 객체, 메시지에서 책임, 구조적 제약 안의 위치</a:t>
-            </a:r>
-          </a:p>
-          <a:p>
-            <a:pPr lvl="3" marL="1077913" indent="-354013">
-              <a:spcBef>
-                <a:spcPts val="600"/>
-              </a:spcBef>
-              <a:spcAft>
-                <a:spcPts val="600"/>
-              </a:spcAft>
-              <a:buSzPct val="90000"/>
-              <a:buFont typeface="Wingdings" pitchFamily="2" charset="2"/>
-              <a:buChar char=""/>
-            </a:pPr>
-            <a:r>
-              <a:rPr sz="1600" b="1">
-                <a:solidFill>
-                  <a:srgbClr val="000000"/>
-                </a:solidFill>
-                <a:latin typeface="맑은 고딕"/>
-                <a:ea typeface="맑은 고딕"/>
-              </a:rPr>
-              <a:t>되돌림</a:t>
-            </a:r>
-            <a:r>
-              <a:rPr sz="1600" b="0">
-                <a:solidFill>
-                  <a:srgbClr val="000000"/>
-                </a:solidFill>
-                <a:latin typeface="맑은 고딕"/>
-                <a:ea typeface="맑은 고딕"/>
-              </a:rPr>
-              <a:t> —</a:t>
-            </a:r>
-            <a:r>
-              <a:rPr sz="1400" b="0">
-                <a:solidFill>
-                  <a:srgbClr val="000000"/>
-                </a:solidFill>
-                <a:latin typeface="맑은 고딕"/>
-                <a:ea typeface="맑은 고딕"/>
-              </a:rPr>
-              <a:t> 업무 의미는 분석 산출물로, 설계 결정은 설계에 남긴다</a:t>
-            </a:r>
-          </a:p>
-          <a:p>
-            <a:pPr lvl="3" marL="1077913" indent="-354013">
-              <a:spcBef>
-                <a:spcPts val="600"/>
-              </a:spcBef>
-              <a:spcAft>
-                <a:spcPts val="600"/>
-              </a:spcAft>
-              <a:buSzPct val="90000"/>
-              <a:buFont typeface="Wingdings" pitchFamily="2" charset="2"/>
-              <a:buChar char=""/>
-            </a:pPr>
-            <a:r>
-              <a:rPr sz="1600" b="1">
-                <a:solidFill>
-                  <a:srgbClr val="000000"/>
-                </a:solidFill>
-                <a:latin typeface="맑은 고딕"/>
-                <a:ea typeface="맑은 고딕"/>
-              </a:rPr>
-              <a:t>잘못된 관행</a:t>
-            </a:r>
-            <a:r>
-              <a:rPr sz="1600" b="0">
-                <a:solidFill>
-                  <a:srgbClr val="000000"/>
-                </a:solidFill>
-                <a:latin typeface="맑은 고딕"/>
-                <a:ea typeface="맑은 고딕"/>
-              </a:rPr>
-              <a:t> —</a:t>
-            </a:r>
-            <a:r>
-              <a:rPr sz="1400" b="0">
-                <a:solidFill>
-                  <a:srgbClr val="000000"/>
-                </a:solidFill>
-                <a:latin typeface="맑은 고딕"/>
-                <a:ea typeface="맑은 고딕"/>
-              </a:rPr>
-              <a:t> 기계적 변환, 데이터만 옮기기, 분석과 단절, 기술 먼저</a:t>
             </a:r>
           </a:p>
           <a:p>
@@ -38724,6 +38546,16 @@
               <a:buChar char=""/>
             </a:pPr>
             <a:r>
+              <a:rPr sz="1800" b="1">
+                <a:solidFill>
+                  <a:srgbClr val="000000"/>
+                </a:solidFill>
+                <a:latin typeface="맑은 고딕"/>
+                <a:ea typeface="맑은 고딕"/>
+              </a:rPr>
+              <a:t>대응</a:t>
+            </a:r>
+            <a:r>
               <a:rPr sz="1800" b="0">
                 <a:solidFill>
                   <a:srgbClr val="000000"/>
@@ -38731,11 +38563,21 @@
                 <a:latin typeface="맑은 고딕"/>
                 <a:ea typeface="맑은 고딕"/>
               </a:rPr>
-              <a:t>다음 세션</a:t>
-            </a:r>
-          </a:p>
-          <a:p>
-            <a:pPr lvl="3" marL="1077913" indent="-354013">
+              <a:t> —</a:t>
+            </a:r>
+            <a:r>
+              <a:rPr sz="1600" b="0">
+                <a:solidFill>
+                  <a:srgbClr val="000000"/>
+                </a:solidFill>
+                <a:latin typeface="맑은 고딕"/>
+                <a:ea typeface="맑은 고딕"/>
+              </a:rPr>
+              <a:t> 1:1이 아니다. 나뉘고, 합쳐지고, 설계에만 있는 요소가 생긴다</a:t>
+            </a:r>
+          </a:p>
+          <a:p>
+            <a:pPr lvl="2" marL="723900" indent="-368300">
               <a:spcBef>
                 <a:spcPts val="600"/>
               </a:spcBef>
@@ -38744,9 +38586,29 @@
               </a:spcAft>
               <a:buSzPct val="90000"/>
               <a:buFont typeface="Wingdings" pitchFamily="2" charset="2"/>
-              <a:buChar char=""/>
+              <a:buChar char=""/>
             </a:pPr>
             <a:r>
+              <a:rPr sz="1800" b="1">
+                <a:solidFill>
+                  <a:srgbClr val="000000"/>
+                </a:solidFill>
+                <a:latin typeface="맑은 고딕"/>
+                <a:ea typeface="맑은 고딕"/>
+              </a:rPr>
+              <a:t>의미 보존</a:t>
+            </a:r>
+            <a:r>
+              <a:rPr sz="1800" b="0">
+                <a:solidFill>
+                  <a:srgbClr val="000000"/>
+                </a:solidFill>
+                <a:latin typeface="맑은 고딕"/>
+                <a:ea typeface="맑은 고딕"/>
+              </a:rPr>
+              <a:t> —</a:t>
+            </a:r>
+            <a:r>
               <a:rPr sz="1600" b="0">
                 <a:solidFill>
                   <a:srgbClr val="000000"/>
@@ -38754,10 +38616,226 @@
                 <a:latin typeface="맑은 고딕"/>
                 <a:ea typeface="맑은 고딕"/>
               </a:rPr>
+              <a:t> 용어·값·규칙·다중성·계약·사건의 순서를 테스트로 확인한다</a:t>
+            </a:r>
+          </a:p>
+          <a:p>
+            <a:pPr lvl="2" marL="723900" indent="-368300">
+              <a:spcBef>
+                <a:spcPts val="600"/>
+              </a:spcBef>
+              <a:spcAft>
+                <a:spcPts val="600"/>
+              </a:spcAft>
+              <a:buSzPct val="90000"/>
+              <a:buFont typeface="Wingdings" pitchFamily="2" charset="2"/>
+              <a:buChar char=""/>
+            </a:pPr>
+            <a:r>
+              <a:rPr sz="1800" b="1">
+                <a:solidFill>
+                  <a:srgbClr val="000000"/>
+                </a:solidFill>
+                <a:latin typeface="맑은 고딕"/>
+                <a:ea typeface="맑은 고딕"/>
+              </a:rPr>
+              <a:t>설계의 이름</a:t>
+            </a:r>
+            <a:r>
+              <a:rPr sz="1800" b="0">
+                <a:solidFill>
+                  <a:srgbClr val="000000"/>
+                </a:solidFill>
+                <a:latin typeface="맑은 고딕"/>
+                <a:ea typeface="맑은 고딕"/>
+              </a:rPr>
+              <a:t> —</a:t>
+            </a:r>
+            <a:r>
+              <a:rPr sz="1600" b="0">
+                <a:solidFill>
+                  <a:srgbClr val="000000"/>
+                </a:solidFill>
+                <a:latin typeface="맑은 고딕"/>
+                <a:ea typeface="맑은 고딕"/>
+              </a:rPr>
+              <a:t> 분석은 한글 용어, 설계는 용어집의 영문명. 새 설계 용어는 용어집에 먼저</a:t>
+            </a:r>
+          </a:p>
+          <a:p>
+            <a:pPr lvl="2" marL="723900" indent="-368300">
+              <a:spcBef>
+                <a:spcPts val="600"/>
+              </a:spcBef>
+              <a:spcAft>
+                <a:spcPts val="600"/>
+              </a:spcAft>
+              <a:buSzPct val="90000"/>
+              <a:buFont typeface="Wingdings" pitchFamily="2" charset="2"/>
+              <a:buChar char=""/>
+            </a:pPr>
+            <a:r>
+              <a:rPr sz="1800" b="1">
+                <a:solidFill>
+                  <a:srgbClr val="000000"/>
+                </a:solidFill>
+                <a:latin typeface="맑은 고딕"/>
+                <a:ea typeface="맑은 고딕"/>
+              </a:rPr>
+              <a:t>초기 설계</a:t>
+            </a:r>
+            <a:r>
+              <a:rPr sz="1800" b="0">
+                <a:solidFill>
+                  <a:srgbClr val="000000"/>
+                </a:solidFill>
+                <a:latin typeface="맑은 고딕"/>
+                <a:ea typeface="맑은 고딕"/>
+              </a:rPr>
+              <a:t> —</a:t>
+            </a:r>
+            <a:r>
+              <a:rPr sz="1600" b="0">
+                <a:solidFill>
+                  <a:srgbClr val="000000"/>
+                </a:solidFill>
+                <a:latin typeface="맑은 고딕"/>
+                <a:ea typeface="맑은 고딕"/>
+              </a:rPr>
+              <a:t> 시스템 이벤트를 받는 객체, 메시지에서 책임, 구조적 제약 안의 위치</a:t>
+            </a:r>
+          </a:p>
+          <a:p>
+            <a:pPr lvl="2" marL="723900" indent="-368300">
+              <a:spcBef>
+                <a:spcPts val="600"/>
+              </a:spcBef>
+              <a:spcAft>
+                <a:spcPts val="600"/>
+              </a:spcAft>
+              <a:buSzPct val="90000"/>
+              <a:buFont typeface="Wingdings" pitchFamily="2" charset="2"/>
+              <a:buChar char=""/>
+            </a:pPr>
+            <a:r>
+              <a:rPr sz="1800" b="1">
+                <a:solidFill>
+                  <a:srgbClr val="000000"/>
+                </a:solidFill>
+                <a:latin typeface="맑은 고딕"/>
+                <a:ea typeface="맑은 고딕"/>
+              </a:rPr>
+              <a:t>되돌림</a:t>
+            </a:r>
+            <a:r>
+              <a:rPr sz="1800" b="0">
+                <a:solidFill>
+                  <a:srgbClr val="000000"/>
+                </a:solidFill>
+                <a:latin typeface="맑은 고딕"/>
+                <a:ea typeface="맑은 고딕"/>
+              </a:rPr>
+              <a:t> —</a:t>
+            </a:r>
+            <a:r>
+              <a:rPr sz="1600" b="0">
+                <a:solidFill>
+                  <a:srgbClr val="000000"/>
+                </a:solidFill>
+                <a:latin typeface="맑은 고딕"/>
+                <a:ea typeface="맑은 고딕"/>
+              </a:rPr>
+              <a:t> 업무 의미는 분석 산출물로, 설계 결정은 설계에 남긴다</a:t>
+            </a:r>
+          </a:p>
+          <a:p>
+            <a:pPr lvl="2" marL="723900" indent="-368300">
+              <a:spcBef>
+                <a:spcPts val="600"/>
+              </a:spcBef>
+              <a:spcAft>
+                <a:spcPts val="600"/>
+              </a:spcAft>
+              <a:buSzPct val="90000"/>
+              <a:buFont typeface="Wingdings" pitchFamily="2" charset="2"/>
+              <a:buChar char=""/>
+            </a:pPr>
+            <a:r>
+              <a:rPr sz="1800" b="1">
+                <a:solidFill>
+                  <a:srgbClr val="000000"/>
+                </a:solidFill>
+                <a:latin typeface="맑은 고딕"/>
+                <a:ea typeface="맑은 고딕"/>
+              </a:rPr>
+              <a:t>잘못된 관행</a:t>
+            </a:r>
+            <a:r>
+              <a:rPr sz="1800" b="0">
+                <a:solidFill>
+                  <a:srgbClr val="000000"/>
+                </a:solidFill>
+                <a:latin typeface="맑은 고딕"/>
+                <a:ea typeface="맑은 고딕"/>
+              </a:rPr>
+              <a:t> —</a:t>
+            </a:r>
+            <a:r>
+              <a:rPr sz="1600" b="0">
+                <a:solidFill>
+                  <a:srgbClr val="000000"/>
+                </a:solidFill>
+                <a:latin typeface="맑은 고딕"/>
+                <a:ea typeface="맑은 고딕"/>
+              </a:rPr>
+              <a:t> 기계적 변환, 데이터만 옮기기, 분석과 단절, 기술 먼저</a:t>
+            </a:r>
+          </a:p>
+          <a:p>
+            <a:pPr marL="342900" indent="0">
+              <a:spcBef>
+                <a:spcPts val="600"/>
+              </a:spcBef>
+              <a:spcAft>
+                <a:spcPts val="600"/>
+              </a:spcAft>
+              <a:buNone/>
+            </a:pPr>
+            <a:r>
+              <a:rPr sz="1800" b="1">
+                <a:solidFill>
+                  <a:srgbClr val="000000"/>
+                </a:solidFill>
+                <a:latin typeface="맑은 고딕"/>
+                <a:ea typeface="맑은 고딕"/>
+              </a:rPr>
+              <a:t>다음 세션</a:t>
+            </a:r>
+          </a:p>
+          <a:p>
+            <a:pPr lvl="2" marL="723900" indent="-368300">
+              <a:spcBef>
+                <a:spcPts val="600"/>
+              </a:spcBef>
+              <a:spcAft>
+                <a:spcPts val="600"/>
+              </a:spcAft>
+              <a:buSzPct val="90000"/>
+              <a:buFont typeface="Wingdings" pitchFamily="2" charset="2"/>
+              <a:buChar char=""/>
+            </a:pPr>
+            <a:r>
+              <a:rPr sz="1800" b="0">
+                <a:solidFill>
+                  <a:srgbClr val="000000"/>
+                </a:solidFill>
+                <a:latin typeface="맑은 고딕"/>
+                <a:ea typeface="맑은 고딕"/>
+              </a:rPr>
               <a:t>"</a:t>
             </a:r>
             <a:r>
-              <a:rPr sz="1600" b="1">
+              <a:rPr sz="1800" b="1">
                 <a:solidFill>
                   <a:srgbClr val="000000"/>
                 </a:solidFill>
@@ -38767,17 +38845,17 @@
               <a:t>07. 책임·협력·계약</a:t>
             </a:r>
             <a:r>
+              <a:rPr sz="1800" b="0">
+                <a:solidFill>
+                  <a:srgbClr val="000000"/>
+                </a:solidFill>
+                <a:latin typeface="맑은 고딕"/>
+                <a:ea typeface="맑은 고딕"/>
+              </a:rPr>
+              <a:t>" —</a:t>
+            </a:r>
+            <a:r>
               <a:rPr sz="1600" b="0">
-                <a:solidFill>
-                  <a:srgbClr val="000000"/>
-                </a:solidFill>
-                <a:latin typeface="맑은 고딕"/>
-                <a:ea typeface="맑은 고딕"/>
-              </a:rPr>
-              <a:t>" —</a:t>
-            </a:r>
-            <a:r>
-              <a:rPr sz="1400" b="0">
                 <a:solidFill>
                   <a:srgbClr val="000000"/>
                 </a:solidFill>
@@ -40038,7 +40116,7 @@
                 <a:latin typeface="맑은 고딕"/>
                 <a:ea typeface="맑은 고딕"/>
               </a:rPr>
-              <a:t>Craig Larman, 2004</a:t>
+              <a:t>[Larman 2004]</a:t>
             </a:r>
           </a:p>
         </p:txBody>
@@ -42118,7 +42196,7 @@
                 <a:latin typeface="맑은 고딕"/>
                 <a:ea typeface="맑은 고딕"/>
               </a:rPr>
-              <a:t>Craig Larman, 2004</a:t>
+              <a:t>[Larman 2004]</a:t>
             </a:r>
           </a:p>
           <a:p>
@@ -42201,7 +42279,7 @@
                 <a:latin typeface="맑은 고딕"/>
                 <a:ea typeface="맑은 고딕"/>
               </a:rPr>
-              <a:t>Craig Larman, 2004</a:t>
+              <a:t>[Larman 2004]</a:t>
             </a:r>
           </a:p>
           <a:p>
@@ -43144,7 +43222,7 @@
                 <a:latin typeface="맑은 고딕"/>
                 <a:ea typeface="맑은 고딕"/>
               </a:rPr>
-              <a:t>Eric Evans, 2015</a:t>
+              <a:t>[Evans 2015]</a:t>
             </a:r>
           </a:p>
         </p:txBody>
@@ -44400,7 +44478,7 @@
                           <a:ea typeface="맑은 고딕" panose="020B0503020000020004" pitchFamily="34" charset="-127"/>
                           <a:cs typeface="맑은 고딕"/>
                         </a:rPr>
-                        <a:t>PaymentSystem, 연동, 저장소</a:t>
+                        <a:t>PaymentGateway, 연동, 저장소</a:t>
                       </a:r>
                     </a:p>
                   </a:txBody>

--- a/courses/ooad/sessions/s06.pptx
+++ b/courses/ooad/sessions/s06.pptx
@@ -954,7 +954,7 @@
             <a:pPr lvl="0"/>
             <a:r>
               <a:rPr lang="ko-KR" sz="1200"/>
-              <a:t>계약의 원천은 "02. 요구 분석과 유스케이스"의 「44. 시스템 오퍼레이션과 계약」과 "04. 동적 모델 — 상호작용과 상태"의 「10. 계약의 정제」다.</a:t>
+              <a:t>계약의 원천은 "02. 요구 분석과 유스케이스"의 「45. 시스템 오퍼레이션과 계약」과 "04. 동적 모델 — 상호작용과 상태"의 「10. 계약의 정제」다.</a:t>
             </a:r>
           </a:p>
           <a:p>
@@ -1111,7 +1111,7 @@
             <a:pPr lvl="0"/>
             <a:r>
               <a:rPr lang="ko-KR" sz="1200"/>
-              <a:t>추적성은 "02. 요구 분석과 유스케이스"의 「55. 요구사항 추적」과 같은 생각이다. 판단에 필요한 관계만 추적하며, 모든 필드를 표로 옮기지 않는다.</a:t>
+              <a:t>추적성은 "02. 요구 분석과 유스케이스"의 「56. 요구사항 추적」과 같은 생각이다. 판단에 필요한 관계만 추적하며, 모든 필드를 표로 옮기지 않는다.</a:t>
             </a:r>
           </a:p>
         </p:txBody>
@@ -23166,7 +23166,7 @@
           </p:nvPr>
         </p:nvGraphicFramePr>
         <p:xfrm>
-          <a:off x="1703895" y="2191766"/>
+          <a:off x="1703895" y="1515110"/>
           <a:ext cx="5722620" cy="3873500"/>
         </p:xfrm>
         <a:graphic>
@@ -23889,7 +23889,7 @@
         </p:nvSpPr>
         <p:spPr>
           <a:xfrm>
-            <a:off x="1033239" y="6355080"/>
+            <a:off x="1033239" y="5678424"/>
             <a:ext cx="6528540" cy="795528"/>
           </a:xfrm>
           <a:prstGeom prst="rect">
@@ -23968,47 +23968,6 @@
                 <a:cs typeface="+mn-cs"/>
               </a:rPr>
               <a:t>- 26 -</a:t>
-            </a:r>
-          </a:p>
-        </p:txBody>
-      </p:sp>
-      <p:sp>
-        <p:nvSpPr>
-          <p:cNvPr id="14" name="TextBox 12">
-            <a:extLst>
-              <a:ext uri="{FF2B5EF4-FFF2-40B4-BE49-F238E27FC236}">
-                <a16:creationId xmlns:a16="http://schemas.microsoft.com/office/drawing/2014/main" id="{654EDDB4-901F-3D48-A715-17D163E8A7AC}"/>
-              </a:ext>
-            </a:extLst>
-          </p:cNvPr>
-          <p:cNvSpPr txBox="1"/>
-          <p:nvPr/>
-        </p:nvSpPr>
-        <p:spPr>
-          <a:xfrm>
-            <a:off x="365760" y="960120"/>
-            <a:ext cx="8412480" cy="676656"/>
-          </a:xfrm>
-          <a:prstGeom prst="rect">
-            <a:avLst/>
-          </a:prstGeom>
-          <a:noFill/>
-        </p:spPr>
-        <p:txBody>
-          <a:bodyPr wrap="square">
-            <a:spAutoFit/>
-          </a:bodyPr>
-          <a:lstStyle/>
-          <a:p>
-            <a:r>
-              <a:rPr sz="1800" b="0" i="1">
-                <a:solidFill>
-                  <a:srgbClr val="000000"/>
-                </a:solidFill>
-                <a:latin typeface="맑은 고딕"/>
-                <a:ea typeface="맑은 고딕"/>
-              </a:rPr>
-              <a:t>책임을 어디에 둘지는 구조적 제약이 먼저 제한한다. 약속은 업무 경계에, 외부 형식은 연동에, 상태 변경은 주문에 둔다.</a:t>
             </a:r>
           </a:p>
         </p:txBody>
@@ -25412,7 +25371,7 @@
           </p:nvPr>
         </p:nvGraphicFramePr>
         <p:xfrm>
-          <a:off x="2208086" y="2191766"/>
+          <a:off x="2208086" y="1515110"/>
           <a:ext cx="4714240" cy="3873500"/>
         </p:xfrm>
         <a:graphic>
@@ -26318,7 +26277,7 @@
         </p:nvSpPr>
         <p:spPr>
           <a:xfrm>
-            <a:off x="1033239" y="6355080"/>
+            <a:off x="1033239" y="5678424"/>
             <a:ext cx="6528540" cy="795528"/>
           </a:xfrm>
           <a:prstGeom prst="rect">
@@ -26397,47 +26356,6 @@
                 <a:cs typeface="+mn-cs"/>
               </a:rPr>
               <a:t>- 29 -</a:t>
-            </a:r>
-          </a:p>
-        </p:txBody>
-      </p:sp>
-      <p:sp>
-        <p:nvSpPr>
-          <p:cNvPr id="14" name="TextBox 12">
-            <a:extLst>
-              <a:ext uri="{FF2B5EF4-FFF2-40B4-BE49-F238E27FC236}">
-                <a16:creationId xmlns:a16="http://schemas.microsoft.com/office/drawing/2014/main" id="{654EDDB4-901F-3D48-A715-17D163E8A7AC}"/>
-              </a:ext>
-            </a:extLst>
-          </p:cNvPr>
-          <p:cNvSpPr txBox="1"/>
-          <p:nvPr/>
-        </p:nvSpPr>
-        <p:spPr>
-          <a:xfrm>
-            <a:off x="365760" y="960120"/>
-            <a:ext cx="8412480" cy="676656"/>
-          </a:xfrm>
-          <a:prstGeom prst="rect">
-            <a:avLst/>
-          </a:prstGeom>
-          <a:noFill/>
-        </p:spPr>
-        <p:txBody>
-          <a:bodyPr wrap="square">
-            <a:spAutoFit/>
-          </a:bodyPr>
-          <a:lstStyle/>
-          <a:p>
-            <a:r>
-              <a:rPr sz="1800" b="0" i="1">
-                <a:solidFill>
-                  <a:srgbClr val="000000"/>
-                </a:solidFill>
-                <a:latin typeface="맑은 고딕"/>
-                <a:ea typeface="맑은 고딕"/>
-              </a:rPr>
-              <a:t>설계 클래스 다이어그램(Design Class Diagram, DCD)은 필드의 타입, 참조의 방향, 책임인 메서드, 인터페이스와 그 실현을 보인다.</a:t>
             </a:r>
           </a:p>
         </p:txBody>

--- a/courses/ooad/sessions/s06.pptx
+++ b/courses/ooad/sessions/s06.pptx
@@ -811,7 +811,7 @@
             <a:pPr lvl="0"/>
             <a:r>
               <a:rPr lang="ko-KR" sz="1200"/>
-              <a:t>단가와 판매가의 구분은 "03. 정적 모델 — 도메인 개념과 관계"의 「35. 현재 값과 확정 값」이다. 상품 객체를 참조하면 누군가 product.salePrice()로 금액을 계산하는 순간 이 의미가 조용히 바뀐다(「17. 조용한 의미 변경」). 용어집이 단가 unitPrice와 판매가 salePrice를 다른 이름으로 정한 이유다.</a:t>
+              <a:t>단가와 판매가의 구분은 "03. 정적 모델 — 도메인 개념과 관계"의 「11. 개념의 분리」의 「현재 값과 확정 값」이다. 상품 객체를 참조하면 누군가 product.salePrice()로 금액을 계산하는 순간 이 의미가 조용히 바뀐다(「17. 조용한 의미 변경」). 용어집이 단가 unitPrice와 판매가 salePrice를 다른 이름으로 정한 이유다.</a:t>
             </a:r>
           </a:p>
           <a:p>
@@ -879,7 +879,7 @@
             <a:pPr lvl="0"/>
             <a:r>
               <a:rPr lang="ko-KR" sz="1200"/>
-              <a:t>도식은 분석의 상태 기계이므로 한글이다. 취소와 관련된 전이만 보였다(배송 완료 생략). 전체 상태 기계는 "04. 동적 모델 — 상호작용과 상태"의 「33. 주문 상태 기계」다.</a:t>
+              <a:t>도식은 분석의 상태 기계이므로 한글이다. 취소와 관련된 전이만 보였다(배송 완료 생략). 전체 상태 기계는 "04. 동적 모델 — 상호작용과 상태"의 「08. 상태 기계 다이어그램」의 「주문 상태 기계」다.</a:t>
             </a:r>
           </a:p>
           <a:p>
@@ -954,7 +954,7 @@
             <a:pPr lvl="0"/>
             <a:r>
               <a:rPr lang="ko-KR" sz="1200"/>
-              <a:t>계약의 원천은 "02. 요구 분석과 유스케이스"의 「45. 시스템 오퍼레이션과 계약」과 "04. 동적 모델 — 상호작용과 상태"의 「10. 계약의 정제」다.</a:t>
+              <a:t>계약의 원천은 "02. 요구 분석과 유스케이스"의 「45. 시스템 오퍼레이션과 계약」과 "04. 동적 모델 — 상호작용과 상태"의 「03. 요구 산출물에서 출발」의 「계약의 정제」다.</a:t>
             </a:r>
           </a:p>
           <a:p>
@@ -1547,7 +1547,7 @@
             <a:pPr lvl="0"/>
             <a:r>
               <a:rPr lang="ko-KR" sz="1200"/>
-              <a:t>주문 서비스라는 이름은 "01. OOAD 개요"의 「23. 분석 모델에서 설계 모델로」 미리보기와 같다. 시스템 오퍼레이션 "주문을 취소한다"는 용어집대로 cancelOrder다.</a:t>
+              <a:t>주문 서비스라는 이름은 "01. OOAD 개요"의 「분석 모델에서 설계 모델로」 미리보기와 같다. 시스템 오퍼레이션 "주문을 취소한다"는 용어집대로 cancelOrder다.</a:t>
             </a:r>
           </a:p>
           <a:p>
@@ -1622,7 +1622,7 @@
             <a:pPr lvl="0"/>
             <a:r>
               <a:rPr lang="ko-KR" sz="1200"/>
-              <a:t>도식은 "04. 동적 모델 — 상호작용과 상태"의 「26. 주문 취소 시퀀스」 그대로다. 분석 시퀀스라 한글이며 설계 객체가 없다. 메시지는 용어집을 거쳐 설계 메서드의 이름이 된다.</a:t>
+              <a:t>도식은 "04. 동적 모델 — 상호작용과 상태"의 「06. 시퀀스 다이어그램」의 「주문 취소 시퀀스」 그대로다. 분석 시퀀스라 한글이며 설계 객체가 없다. 메시지는 용어집을 거쳐 설계 메서드의 이름이 된다.</a:t>
             </a:r>
           </a:p>
           <a:p>
@@ -2154,7 +2154,7 @@
             <a:pPr lvl="0"/>
             <a:r>
               <a:rPr lang="ko-KR" sz="1200"/>
-              <a:t>인용 근거: Craig Larman, *Applying UML and Patterns*, 3rd ed.(2004), §9.5 "Method 3: Finding Conceptual Classes with Noun Phrase Identification" 원문 확인. "03. 정적 모델 — 도메인 개념과 관계"의 「44. 도메인 모델 — 초안」 앞의 개념 찾기와 같은 절의 다른 문장이다.</a:t>
+              <a:t>인용 근거: Craig Larman, *Applying UML and Patterns*, 3rd ed.(2004), §9.5 "Method 3: Finding Conceptual Classes with Noun Phrase Identification" 원문 확인. "03. 정적 모델 — 도메인 개념과 관계"의 「14. 도메인 모델 작성」의 「초안」 앞의 개념 찾기와 같은 절의 다른 문장이다.</a:t>
             </a:r>
           </a:p>
           <a:p>
@@ -2747,7 +2747,7 @@
             <a:pPr lvl="0"/>
             <a:r>
               <a:rPr lang="ko-KR" sz="1200"/>
-              <a:t>입력의 출처 — "03. 정적 모델 — 도메인 개념과 관계"의 「45. 도메인 모델 — 상세화」, "04. 동적 모델 — 상호작용과 상태"의 「26. 주문 취소 시퀀스」·「33. 주문 상태 기계」, "05. 구조적 경계와 의존성"의 「14. 주문 시스템 패키지 — 상세화」·「18. 구조적 제약」.</a:t>
+              <a:t>입력의 출처 — "03. 정적 모델 — 도메인 개념과 관계"의 「14. 도메인 모델 작성」의 「상세화」, "04. 동적 모델 — 상호작용과 상태"의 「06. 시퀀스 다이어그램」·「08. 상태 기계 다이어그램」, "05. 구조적 경계와 의존성"의 「14. 주문 시스템 패키지 — 상세화」·「18. 구조적 제약」.</a:t>
             </a:r>
           </a:p>
           <a:p>
@@ -4904,6 +4904,48 @@
               <a:t>15. 주문 사례 대응표</a:t>
             </a:r>
           </a:p>
+          <a:p>
+            <a:pPr lvl="1" marL="355600" indent="0">
+              <a:spcBef>
+                <a:spcPts val="300"/>
+              </a:spcBef>
+              <a:spcAft>
+                <a:spcPts val="300"/>
+              </a:spcAft>
+              <a:buNone/>
+            </a:pPr>
+            <a:r>
+              <a:rPr sz="1600" b="0">
+                <a:solidFill>
+                  <a:srgbClr val="000000"/>
+                </a:solidFill>
+                <a:latin typeface="맑은 고딕"/>
+                <a:ea typeface="맑은 고딕"/>
+              </a:rPr>
+              <a:t>16. 의미 보존 기준</a:t>
+            </a:r>
+          </a:p>
+          <a:p>
+            <a:pPr lvl="1" marL="355600" indent="0">
+              <a:spcBef>
+                <a:spcPts val="300"/>
+              </a:spcBef>
+              <a:spcAft>
+                <a:spcPts val="300"/>
+              </a:spcAft>
+              <a:buNone/>
+            </a:pPr>
+            <a:r>
+              <a:rPr sz="1600" b="0">
+                <a:solidFill>
+                  <a:srgbClr val="000000"/>
+                </a:solidFill>
+                <a:latin typeface="맑은 고딕"/>
+                <a:ea typeface="맑은 고딕"/>
+              </a:rPr>
+              <a:t>17. 조용한 의미 변경</a:t>
+            </a:r>
+          </a:p>
         </p:txBody>
       </p:sp>
       <p:sp>
@@ -5026,7 +5068,7 @@
                 <a:latin typeface="맑은 고딕"/>
                 <a:ea typeface="맑은 고딕"/>
               </a:rPr>
-              <a:t>16. 의미 보존 기준</a:t>
+              <a:t>18. 보존의 검증</a:t>
             </a:r>
           </a:p>
           <a:p>
@@ -5047,7 +5089,7 @@
                 <a:latin typeface="맑은 고딕"/>
                 <a:ea typeface="맑은 고딕"/>
               </a:rPr>
-              <a:t>17. 조용한 의미 변경</a:t>
+              <a:t>19. 분석 모델 되돌림</a:t>
             </a:r>
           </a:p>
           <a:p>
@@ -5068,7 +5110,7 @@
                 <a:latin typeface="맑은 고딕"/>
                 <a:ea typeface="맑은 고딕"/>
               </a:rPr>
-              <a:t>18. 보존의 검증</a:t>
+              <a:t>20. 초기 설계</a:t>
             </a:r>
           </a:p>
           <a:p>
@@ -5089,7 +5131,7 @@
                 <a:latin typeface="맑은 고딕"/>
                 <a:ea typeface="맑은 고딕"/>
               </a:rPr>
-              <a:t>19. 분석 모델 되돌림</a:t>
+              <a:t>21. 시스템 이벤트를 받는 객체</a:t>
             </a:r>
           </a:p>
           <a:p>
@@ -5110,7 +5152,7 @@
                 <a:latin typeface="맑은 고딕"/>
                 <a:ea typeface="맑은 고딕"/>
               </a:rPr>
-              <a:t>20. 초기 설계</a:t>
+              <a:t>22. 메시지에서 책임으로</a:t>
             </a:r>
           </a:p>
           <a:p>
@@ -5131,7 +5173,7 @@
                 <a:latin typeface="맑은 고딕"/>
                 <a:ea typeface="맑은 고딕"/>
               </a:rPr>
-              <a:t>21. 시스템 이벤트를 받는 객체</a:t>
+              <a:t>23. 경계가 정하는 위치</a:t>
             </a:r>
           </a:p>
           <a:p>
@@ -5152,7 +5194,7 @@
                 <a:latin typeface="맑은 고딕"/>
                 <a:ea typeface="맑은 고딕"/>
               </a:rPr>
-              <a:t>22. 메시지에서 책임으로</a:t>
+              <a:t>24. 주문 취소 설계 시퀀스</a:t>
             </a:r>
           </a:p>
           <a:p>
@@ -5173,7 +5215,7 @@
                 <a:latin typeface="맑은 고딕"/>
                 <a:ea typeface="맑은 고딕"/>
               </a:rPr>
-              <a:t>23. 경계가 정하는 위치</a:t>
+              <a:t>25. 설계 클래스 다이어그램</a:t>
             </a:r>
           </a:p>
           <a:p>
@@ -5194,7 +5236,7 @@
                 <a:latin typeface="맑은 고딕"/>
                 <a:ea typeface="맑은 고딕"/>
               </a:rPr>
-              <a:t>24. 주문 취소 설계 시퀀스</a:t>
+              <a:t>26. 설계에서 코드로</a:t>
             </a:r>
           </a:p>
           <a:p>
@@ -5215,7 +5257,7 @@
                 <a:latin typeface="맑은 고딕"/>
                 <a:ea typeface="맑은 고딕"/>
               </a:rPr>
-              <a:t>25. 설계 클래스 다이어그램</a:t>
+              <a:t>27. 초기 설계의 한계</a:t>
             </a:r>
           </a:p>
           <a:p>
@@ -5236,7 +5278,17 @@
                 <a:latin typeface="맑은 고딕"/>
                 <a:ea typeface="맑은 고딕"/>
               </a:rPr>
-              <a:t>26. 설계에서 코드로</a:t>
+              <a:t>28. 잘못된 관행 —</a:t>
+            </a:r>
+            <a:r>
+              <a:rPr sz="1400" b="0">
+                <a:solidFill>
+                  <a:srgbClr val="000000"/>
+                </a:solidFill>
+                <a:latin typeface="맑은 고딕"/>
+                <a:ea typeface="맑은 고딕"/>
+              </a:rPr>
+              <a:t> 기계적 변환</a:t>
             </a:r>
           </a:p>
           <a:p>
@@ -5257,7 +5309,17 @@
                 <a:latin typeface="맑은 고딕"/>
                 <a:ea typeface="맑은 고딕"/>
               </a:rPr>
-              <a:t>27. 초기 설계의 한계</a:t>
+              <a:t>29. 잘못된 관행 —</a:t>
+            </a:r>
+            <a:r>
+              <a:rPr sz="1400" b="0">
+                <a:solidFill>
+                  <a:srgbClr val="000000"/>
+                </a:solidFill>
+                <a:latin typeface="맑은 고딕"/>
+                <a:ea typeface="맑은 고딕"/>
+              </a:rPr>
+              <a:t> 데이터만 옮기기</a:t>
             </a:r>
           </a:p>
           <a:p>
@@ -5278,7 +5340,7 @@
                 <a:latin typeface="맑은 고딕"/>
                 <a:ea typeface="맑은 고딕"/>
               </a:rPr>
-              <a:t>28. 잘못된 관행 —</a:t>
+              <a:t>30. 잘못된 관행 —</a:t>
             </a:r>
             <a:r>
               <a:rPr sz="1400" b="0">
@@ -5288,7 +5350,7 @@
                 <a:latin typeface="맑은 고딕"/>
                 <a:ea typeface="맑은 고딕"/>
               </a:rPr>
-              <a:t> 기계적 변환</a:t>
+              <a:t> 분석과 단절</a:t>
             </a:r>
           </a:p>
           <a:p>
@@ -5309,7 +5371,7 @@
                 <a:latin typeface="맑은 고딕"/>
                 <a:ea typeface="맑은 고딕"/>
               </a:rPr>
-              <a:t>29. 잘못된 관행 —</a:t>
+              <a:t>31. 잘못된 관행 —</a:t>
             </a:r>
             <a:r>
               <a:rPr sz="1400" b="0">
@@ -5319,7 +5381,7 @@
                 <a:latin typeface="맑은 고딕"/>
                 <a:ea typeface="맑은 고딕"/>
               </a:rPr>
-              <a:t> 데이터만 옮기기</a:t>
+              <a:t> 기술 먼저</a:t>
             </a:r>
           </a:p>
           <a:p>
@@ -5340,7 +5402,28 @@
                 <a:latin typeface="맑은 고딕"/>
                 <a:ea typeface="맑은 고딕"/>
               </a:rPr>
-              <a:t>30. 잘못된 관행 —</a:t>
+              <a:t>32. 적정 전환</a:t>
+            </a:r>
+          </a:p>
+          <a:p>
+            <a:pPr lvl="1" marL="355600" indent="0">
+              <a:spcBef>
+                <a:spcPts val="300"/>
+              </a:spcBef>
+              <a:spcAft>
+                <a:spcPts val="300"/>
+              </a:spcAft>
+              <a:buNone/>
+            </a:pPr>
+            <a:r>
+              <a:rPr sz="1600" b="0">
+                <a:solidFill>
+                  <a:srgbClr val="000000"/>
+                </a:solidFill>
+                <a:latin typeface="맑은 고딕"/>
+                <a:ea typeface="맑은 고딕"/>
+              </a:rPr>
+              <a:t>33. 실습 —</a:t>
             </a:r>
             <a:r>
               <a:rPr sz="1400" b="0">
@@ -5350,7 +5433,38 @@
                 <a:latin typeface="맑은 고딕"/>
                 <a:ea typeface="맑은 고딕"/>
               </a:rPr>
-              <a:t> 분석과 단절</a:t>
+              <a:t> 분석에서 설계로</a:t>
+            </a:r>
+          </a:p>
+          <a:p>
+            <a:pPr lvl="1" marL="355600" indent="0">
+              <a:spcBef>
+                <a:spcPts val="300"/>
+              </a:spcBef>
+              <a:spcAft>
+                <a:spcPts val="300"/>
+              </a:spcAft>
+              <a:buNone/>
+            </a:pPr>
+            <a:r>
+              <a:rPr sz="1600" b="0">
+                <a:solidFill>
+                  <a:srgbClr val="000000"/>
+                </a:solidFill>
+                <a:latin typeface="맑은 고딕"/>
+                <a:ea typeface="맑은 고딕"/>
+              </a:rPr>
+              <a:t>34. 대응표 </a:t>
+            </a:r>
+            <a:r>
+              <a:rPr sz="1200" b="0">
+                <a:solidFill>
+                  <a:srgbClr val="000000"/>
+                </a:solidFill>
+                <a:latin typeface="맑은 고딕"/>
+                <a:ea typeface="맑은 고딕"/>
+              </a:rPr>
+              <a:t>(안)</a:t>
             </a:r>
           </a:p>
         </p:txBody>
@@ -17700,120 +17814,6 @@
                 <a:latin typeface="맑은 고딕"/>
                 <a:ea typeface="맑은 고딕"/>
               </a:rPr>
-              <a:t>31. 잘못된 관행 —</a:t>
-            </a:r>
-            <a:r>
-              <a:rPr sz="1400" b="0">
-                <a:solidFill>
-                  <a:srgbClr val="000000"/>
-                </a:solidFill>
-                <a:latin typeface="맑은 고딕"/>
-                <a:ea typeface="맑은 고딕"/>
-              </a:rPr>
-              <a:t> 기술 먼저</a:t>
-            </a:r>
-          </a:p>
-          <a:p>
-            <a:pPr lvl="1" marL="355600" indent="0">
-              <a:spcBef>
-                <a:spcPts val="300"/>
-              </a:spcBef>
-              <a:spcAft>
-                <a:spcPts val="300"/>
-              </a:spcAft>
-              <a:buNone/>
-            </a:pPr>
-            <a:r>
-              <a:rPr sz="1600" b="0">
-                <a:solidFill>
-                  <a:srgbClr val="000000"/>
-                </a:solidFill>
-                <a:latin typeface="맑은 고딕"/>
-                <a:ea typeface="맑은 고딕"/>
-              </a:rPr>
-              <a:t>32. 적정 전환</a:t>
-            </a:r>
-          </a:p>
-          <a:p>
-            <a:pPr lvl="1" marL="355600" indent="0">
-              <a:spcBef>
-                <a:spcPts val="300"/>
-              </a:spcBef>
-              <a:spcAft>
-                <a:spcPts val="300"/>
-              </a:spcAft>
-              <a:buNone/>
-            </a:pPr>
-            <a:r>
-              <a:rPr sz="1600" b="0">
-                <a:solidFill>
-                  <a:srgbClr val="000000"/>
-                </a:solidFill>
-                <a:latin typeface="맑은 고딕"/>
-                <a:ea typeface="맑은 고딕"/>
-              </a:rPr>
-              <a:t>33. 실습 —</a:t>
-            </a:r>
-            <a:r>
-              <a:rPr sz="1400" b="0">
-                <a:solidFill>
-                  <a:srgbClr val="000000"/>
-                </a:solidFill>
-                <a:latin typeface="맑은 고딕"/>
-                <a:ea typeface="맑은 고딕"/>
-              </a:rPr>
-              <a:t> 분석에서 설계로</a:t>
-            </a:r>
-          </a:p>
-          <a:p>
-            <a:pPr lvl="1" marL="355600" indent="0">
-              <a:spcBef>
-                <a:spcPts val="300"/>
-              </a:spcBef>
-              <a:spcAft>
-                <a:spcPts val="300"/>
-              </a:spcAft>
-              <a:buNone/>
-            </a:pPr>
-            <a:r>
-              <a:rPr sz="1600" b="0">
-                <a:solidFill>
-                  <a:srgbClr val="000000"/>
-                </a:solidFill>
-                <a:latin typeface="맑은 고딕"/>
-                <a:ea typeface="맑은 고딕"/>
-              </a:rPr>
-              <a:t>34. 대응표 </a:t>
-            </a:r>
-            <a:r>
-              <a:rPr sz="1200" b="0">
-                <a:solidFill>
-                  <a:srgbClr val="000000"/>
-                </a:solidFill>
-                <a:latin typeface="맑은 고딕"/>
-                <a:ea typeface="맑은 고딕"/>
-              </a:rPr>
-              <a:t>(안)</a:t>
-            </a:r>
-          </a:p>
-          <a:p>
-            <a:pPr lvl="1" marL="355600" indent="0">
-              <a:spcBef>
-                <a:spcPts val="300"/>
-              </a:spcBef>
-              <a:spcAft>
-                <a:spcPts val="300"/>
-              </a:spcAft>
-              <a:buNone/>
-            </a:pPr>
-            <a:r>
-              <a:rPr sz="1600" b="0">
-                <a:solidFill>
-                  <a:srgbClr val="000000"/>
-                </a:solidFill>
-                <a:latin typeface="맑은 고딕"/>
-                <a:ea typeface="맑은 고딕"/>
-              </a:rPr>
               <a:t>35. 설계 클래스 다이어그램 </a:t>
             </a:r>
             <a:r>
@@ -22967,7 +22967,7 @@
         </p:blipFill>
         <p:spPr>
           <a:xfrm>
-            <a:off x="2606919" y="1924333"/>
+            <a:off x="2606919" y="1924332"/>
             <a:ext cx="3930162" cy="4343400"/>
           </a:xfrm>
           <a:prstGeom prst="rect">
@@ -37353,7 +37353,7 @@
         <p:spPr>
           <a:xfrm>
             <a:off x="233172" y="1414318"/>
-            <a:ext cx="4338828" cy="5068778"/>
+            <a:ext cx="4338828" cy="4898147"/>
           </a:xfrm>
         </p:spPr>
         <p:txBody>
@@ -37763,7 +37763,7 @@
         <p:spPr>
           <a:xfrm>
             <a:off x="4572000" y="1414318"/>
-            <a:ext cx="4439412" cy="5068778"/>
+            <a:ext cx="4439412" cy="4898147"/>
           </a:xfrm>
         </p:spPr>
         <p:txBody>

--- a/courses/ooad/sessions/s06.pptx
+++ b/courses/ooad/sessions/s06.pptx
@@ -585,7 +585,7 @@
             <a:pPr lvl="0"/>
             <a:r>
               <a:rPr lang="ko-KR" sz="1200"/>
-              <a:t>Money는 "05. 구조적 경계와 의존성"의 결정대로 payment 패키지에 있다. 이 세션은 규칙(0 이상)과 계산을 더했다. Quantity·Address는 order 패키지의 값 타입이다.</a:t>
+              <a:t>Money는 "세션 05. 구조적 경계와 의존성"의 결정대로 payment 패키지에 있다. 이 세션은 규칙(0 이상)과 계산을 더했다. Quantity·Address는 order 패키지의 값 타입이다.</a:t>
             </a:r>
           </a:p>
           <a:p>
@@ -653,7 +653,7 @@
             <a:pPr lvl="0"/>
             <a:r>
               <a:rPr lang="ko-KR" sz="1200"/>
-              <a:t>방향의 근거 — 취소 시퀀스에서 메시지는 주문 → 배송, 주문 → 결제로 흐른다. 패키지 의존(주문 → 결제·배송)도 같은 방향이다("05. 구조적 경계와 의존성"의 「10. 의존 방향」).</a:t>
+              <a:t>방향의 근거 — 취소 시퀀스에서 메시지는 주문 → 배송, 주문 → 결제로 흐른다. 패키지 의존(주문 → 결제·배송)도 같은 방향이다("세션 05. 구조적 경계와 의존성"의 「10. 의존 방향」).</a:t>
             </a:r>
           </a:p>
           <a:p>
@@ -735,7 +735,7 @@
             <a:pPr lvl="0"/>
             <a:r>
               <a:rPr lang="ko-KR" sz="1200"/>
-              <a:t>단가와 판매가의 구분은 "03. 정적 모델 — 도메인 개념과 관계"의 「11. 개념의 분리」의 「현재 값과 확정 값」이다. 상품 객체를 참조하면 누군가 product.salePrice()로 금액을 계산하는 순간 이 의미가 조용히 바뀐다(「17. 조용한 의미 변경」). 용어집이 단가 unitPrice와 판매가 salePrice를 다른 이름으로 정한 이유다.</a:t>
+              <a:t>단가와 판매가의 구분은 "세션 03. 정적 모델 — 도메인 개념과 관계"의 「11. 개념의 분리」의 「현재 값과 확정 값」이다. 상품 객체를 참조하면 누군가 product.salePrice()로 금액을 계산하는 순간 이 의미가 조용히 바뀐다(「17. 조용한 의미 변경」). 용어집이 단가 unitPrice와 판매가 salePrice를 다른 이름으로 정한 이유다.</a:t>
             </a:r>
           </a:p>
           <a:p>
@@ -803,7 +803,7 @@
             <a:pPr lvl="0"/>
             <a:r>
               <a:rPr lang="ko-KR" sz="1200"/>
-              <a:t>도식은 분석의 상태 기계이므로 한글이다. 취소와 관련된 전이만 보였다(배송 완료 생략). 전체 상태 기계는 "04. 동적 모델 — 상호작용과 상태"의 「08. 상태 기계 다이어그램」의 「주문 상태 기계」다.</a:t>
+              <a:t>도식은 분석의 상태 기계이므로 한글이다. 취소와 관련된 전이만 보였다(배송 완료 생략). 전체 상태 기계는 "세션 04. 동적 모델 — 상호작용과 상태"의 「08. 상태 기계 다이어그램」의 「주문 상태 기계」다.</a:t>
             </a:r>
           </a:p>
           <a:p>
@@ -878,7 +878,7 @@
             <a:pPr lvl="0"/>
             <a:r>
               <a:rPr lang="ko-KR" sz="1200"/>
-              <a:t>계약의 원천은 "02. 요구 분석과 유스케이스"의 「45. 시스템 오퍼레이션과 계약」과 "04. 동적 모델 — 상호작용과 상태"의 「03. 요구 산출물에서 출발」의 「계약의 정제」다.</a:t>
+              <a:t>계약의 원천은 "세션 02. 요구 분석과 유스케이스"의 「45. 시스템 오퍼레이션과 계약」과 "세션 04. 동적 모델 — 상호작용과 상태"의 「03. 요구 산출물에서 출발」의 「계약의 정제」다.</a:t>
             </a:r>
           </a:p>
           <a:p>
@@ -892,7 +892,7 @@
             <a:pPr lvl="0"/>
             <a:r>
               <a:rPr lang="ko-KR" sz="1200"/>
-              <a:t>객체 하나의 사전·사후조건·불변 조건(객체 계약)은 "07. 책임·협력·계약"에서 정한다. 이 세션은 시스템 계약을 어느 객체들이 나누어 지키는지까지만 정한다.</a:t>
+              <a:t>객체 하나의 사전·사후조건·불변 조건(객체 계약)은 "세션 07. 책임·협력·계약"에서 정한다. 이 세션은 시스템 계약을 어느 객체들이 나누어 지키는지까지만 정한다.</a:t>
             </a:r>
           </a:p>
         </p:txBody>
@@ -953,14 +953,14 @@
             <a:pPr lvl="0"/>
             <a:r>
               <a:rPr lang="ko-KR" sz="1200"/>
-              <a:t>"05. 구조적 경계와 의존성"의 「17. 코드와 검사」의 「통보 변환 코드」는 연동이 주문 객체를 직접 받았다. 설계에서는 외부가 아는 것은 주문 번호뿐이므로, 주문을 찾는 책임이 주문 서비스에 생긴다. 구조적 제약("연동은 통보를 전할 뿐")은 그대로다.</a:t>
+              <a:t>"세션 05. 구조적 경계와 의존성"의 「17. 코드와 검사」의 「통보 변환 코드」는 연동이 주문 객체를 직접 받았다. 설계에서는 외부가 아는 것은 주문 번호뿐이므로, 주문을 찾는 책임이 주문 서비스에 생긴다. 구조적 제약("연동은 통보를 전할 뿐")은 그대로다.</a:t>
             </a:r>
           </a:p>
           <a:p>
             <a:pPr lvl="0"/>
             <a:r>
               <a:rPr lang="ko-KR" sz="1200"/>
-              <a:t>상태 코드와 통보에 주문 번호가 실린다는 것은 교육용 가정이다. 전달 기술(메시지 큐·웹훅)은 "10. 기술 제약과 도메인 의미 보존"에서 다룬다.</a:t>
+              <a:t>상태 코드와 통보에 주문 번호가 실린다는 것은 교육용 가정이다. 전달 기술(메시지 큐·웹훅)은 "세션 10. 기술 제약과 도메인 의미 보존"에서 다룬다.</a:t>
             </a:r>
           </a:p>
         </p:txBody>
@@ -1035,7 +1035,7 @@
             <a:pPr lvl="0"/>
             <a:r>
               <a:rPr lang="ko-KR" sz="1200"/>
-              <a:t>추적성은 "02. 요구 분석과 유스케이스"의 「64. 요구사항 추적」과 같은 생각이다. 판단에 필요한 관계만 추적하며, 모든 필드를 표로 옮기지 않는다.</a:t>
+              <a:t>추적성은 "세션 02. 요구 분석과 유스케이스"의 「64. 요구사항 추적」과 같은 생각이다. 판단에 필요한 관계만 추적하며, 모든 필드를 표로 옮기지 않는다.</a:t>
             </a:r>
           </a:p>
         </p:txBody>
@@ -1096,7 +1096,7 @@
             <a:pPr lvl="0"/>
             <a:r>
               <a:rPr lang="ko-KR" sz="1200"/>
-              <a:t>기준의 출처 — 용어·값은 용어집("02. 요구 분석과 유스케이스"의 「18. 용어집」)과 과정의 공통 전제, 규칙·다중성은 도메인 모델, 계약은 요구 산출물, 사건의 순서는 동적 모델이다.</a:t>
+              <a:t>기준의 출처 — 용어·값은 용어집("세션 02. 요구 분석과 유스케이스"의 「18. 용어집」)과 과정의 공통 전제, 규칙·다중성은 도메인 모델, 계약은 요구 산출물, 사건의 순서는 동적 모델이다.</a:t>
             </a:r>
           </a:p>
           <a:p>
@@ -1171,7 +1171,7 @@
             <a:pPr lvl="0"/>
             <a:r>
               <a:rPr lang="ko-KR" sz="1200"/>
-              <a:t>일곱 예는 모두 이 과정의 주문 사례에서 앞 세션이 확인한 의미를 어긴다 — 단가와 판매가("02. 요구 분석과 유스케이스"의 용어집, "03. 정적 모델 — 도메인 개념과 관계"), 취소 처리 중과 출고·배송 시작("04. 동적 모델 — 상호작용과 상태"), 외부 형식("05. 구조적 경계와 의존성").</a:t>
+              <a:t>일곱 예는 모두 이 과정의 주문 사례에서 앞 세션이 확인한 의미를 어긴다 — 단가와 판매가("세션 02. 요구 분석과 유스케이스"의 용어집, "세션 03. 정적 모델 — 도메인 개념과 관계"), 취소 처리 중과 출고·배송 시작("세션 04. 동적 모델 — 상호작용과 상태"), 외부 형식("세션 05. 구조적 경계와 의존성").</a:t>
             </a:r>
           </a:p>
           <a:p>
@@ -1253,7 +1253,7 @@
             <a:pPr lvl="0"/>
             <a:r>
               <a:rPr lang="ko-KR" sz="1200"/>
-              <a:t>이 테스트는 "03. 정적 모델 — 도메인 개념과 관계"의 규칙 테스트와 같은 기대값이다. 설계가 바뀌어도 기대값이 같다는 것이 의미 보존의 증거다.</a:t>
+              <a:t>이 테스트는 "세션 03. 정적 모델 — 도메인 개념과 관계"의 규칙 테스트와 같은 기대값이다. 설계가 바뀌어도 기대값이 같다는 것이 의미 보존의 증거다.</a:t>
             </a:r>
           </a:p>
           <a:p>
@@ -1321,7 +1321,7 @@
             <a:pPr lvl="0"/>
             <a:r>
               <a:rPr lang="ko-KR" sz="1200"/>
-              <a:t>이 세션의 설계는 첫 책임 배치까지다. 책임의 정제와 객체 계약·SOLID는 "07. 책임·협력·계약", 변경 압력에 따른 변이는 "08. 변화 대응과 변이 설계", 저장 기술은 "10. 기술 제약과 도메인 의미 보존"에서 다룬다.</a:t>
+              <a:t>이 세션의 설계는 첫 책임 배치까지다. 책임의 정제와 객체 계약·SOLID는 "세션 07. 책임·협력·계약", 변경 압력에 따른 변이는 "세션 08. 변화 대응과 변이 설계", 저장 기술은 "세션 10. 기술 제약과 도메인 의미 보존"에서 다룬다.</a:t>
             </a:r>
           </a:p>
         </p:txBody>
@@ -1389,7 +1389,7 @@
             <a:pPr lvl="0"/>
             <a:r>
               <a:rPr lang="ko-KR" sz="1200"/>
-              <a:t>되돌림은 "02. 요구 분석과 유스케이스"의 정제된 SSD·명세서, "03. 정적 모델 — 도메인 개념과 관계"의 도메인 모델에 한다. 보완을 위한 새 산출물은 만들지 않는다.</a:t>
+              <a:t>되돌림은 "세션 02. 요구 분석과 유스케이스"의 정제된 SSD·명세서, "세션 03. 정적 모델 — 도메인 개념과 관계"의 도메인 모델에 한다. 보완을 위한 새 산출물은 만들지 않는다.</a:t>
             </a:r>
           </a:p>
           <a:p>
@@ -1464,7 +1464,7 @@
             <a:pPr lvl="0"/>
             <a:r>
               <a:rPr lang="ko-KR" sz="1200"/>
-              <a:t>"기본적인" 배정만 가져온다. 책임 후보를 비교하고 정제하는 일은 "07. 책임·협력·계약"에서 한다.</a:t>
+              <a:t>"기본적인" 배정만 가져온다. 책임 후보를 비교하고 정제하는 일은 "세션 07. 책임·협력·계약"에서 한다.</a:t>
             </a:r>
           </a:p>
           <a:p>
@@ -1532,14 +1532,14 @@
             <a:pPr lvl="0"/>
             <a:r>
               <a:rPr lang="ko-KR" sz="1200"/>
-              <a:t>주문 서비스라는 이름은 "01. OOAD 개요"의 「분석 모델에서 설계 모델로」 미리보기와 같다. 시스템 오퍼레이션 "주문을 취소한다"는 용어집대로 cancelOrder다.</a:t>
+              <a:t>주문 서비스라는 이름은 "세션 01. OOAD 개요"의 「분석 모델에서 설계 모델로」 미리보기와 같다. 시스템 오퍼레이션 "주문을 취소한다"는 용어집대로 cancelOrder다.</a:t>
             </a:r>
           </a:p>
           <a:p>
             <a:pPr lvl="0"/>
             <a:r>
               <a:rPr lang="ko-KR" sz="1200"/>
-              <a:t>시스템 이벤트를 받는 객체를 정하는 원칙은 GRASP의 컨트롤러(Controller)다. GRASP는 "07. 책임·협력·계약"의 「07. GRASP」에서 소개한다. 여기서는 판단 근거(규칙과 조정의 분리)만 본다.</a:t>
+              <a:t>시스템 이벤트를 받는 객체를 정하는 원칙은 GRASP의 컨트롤러(Controller)다. GRASP는 "세션 07. 책임·협력·계약"의 「07. GRASP」에서 소개한다. 여기서는 판단 근거(규칙과 조정의 분리)만 본다.</a:t>
             </a:r>
           </a:p>
           <a:p>
@@ -1607,14 +1607,14 @@
             <a:pPr lvl="0"/>
             <a:r>
               <a:rPr lang="ko-KR" sz="1200"/>
-              <a:t>도식은 "04. 동적 모델 — 상호작용과 상태"의 「06. 시퀀스 다이어그램」의 「주문 취소 시퀀스」 그대로다. 분석 시퀀스라 한글이며 설계 객체가 없다. 메시지는 용어집을 거쳐 설계 메서드의 이름이 된다.</a:t>
+              <a:t>도식은 "세션 04. 동적 모델 — 상호작용과 상태"의 「06. 시퀀스 다이어그램」의 「주문 취소 시퀀스」 그대로다. 분석 시퀀스라 한글이며 설계 객체가 없다. 메시지는 용어집을 거쳐 설계 메서드의 이름이 된다.</a:t>
             </a:r>
           </a:p>
           <a:p>
             <a:pPr lvl="0"/>
             <a:r>
               <a:rPr lang="ko-KR" sz="1200"/>
-              <a:t>책임은 하는 것(doing)과 아는 것(knowing)으로 나눈다. 이 구분과 책임 배치의 원칙은 "07. 책임·협력·계약"에서 다룬다.</a:t>
+              <a:t>책임은 하는 것(doing)과 아는 것(knowing)으로 나눈다. 이 구분과 책임 배치의 원칙은 "세션 07. 책임·협력·계약"에서 다룬다.</a:t>
             </a:r>
           </a:p>
           <a:p>
@@ -1682,14 +1682,14 @@
             <a:pPr lvl="0"/>
             <a:r>
               <a:rPr lang="ko-KR" sz="1200"/>
-              <a:t>제약의 원천은 "05. 구조적 경계와 의존성"의 「16. 구조적 제약」이다. 주문 서비스·주문 저장소는 주문 경계 안에 둔다 — 주문과 함께 바뀌기 때문이다.</a:t>
+              <a:t>제약의 원천은 "세션 05. 구조적 경계와 의존성"의 「16. 구조적 제약」이다. 주문 서비스·주문 저장소는 주문 경계 안에 둔다 — 주문과 함께 바뀌기 때문이다.</a:t>
             </a:r>
           </a:p>
           <a:p>
             <a:pPr lvl="0"/>
             <a:r>
               <a:rPr lang="ko-KR" sz="1200"/>
-              <a:t>연동 → 주문 의존은 "05. 구조적 경계와 의존성"과 같다. 설계에서 바뀐 것은 연동이 부르는 대상이 주문에서 주문 서비스로 옮겨 간 것뿐이다.</a:t>
+              <a:t>연동 → 주문 의존은 "세션 05. 구조적 경계와 의존성"과 같다. 설계에서 바뀐 것은 연동이 부르는 대상이 주문에서 주문 서비스로 옮겨 간 것뿐이다.</a:t>
             </a:r>
           </a:p>
           <a:p>
@@ -1853,14 +1853,14 @@
             <a:pPr lvl="0"/>
             <a:r>
               <a:rPr lang="ko-KR" sz="1200"/>
-              <a:t>클래스·필드·메서드의 이름은 모두 용어집의 영문명이다. 타입 PascalCase, 필드·메서드 camelCase, 통보는 on으로 시작한다("05. 구조적 경계와 의존성"의 「05. 설계의 이름」).</a:t>
+              <a:t>클래스·필드·메서드의 이름은 모두 용어집의 영문명이다. 타입 PascalCase, 필드·메서드 camelCase, 통보는 on으로 시작한다("세션 05. 구조적 경계와 의존성"의 「05. 설계의 이름」).</a:t>
             </a:r>
           </a:p>
           <a:p>
             <a:pPr lvl="0"/>
             <a:r>
               <a:rPr lang="ko-KR" sz="1200"/>
-              <a:t>환불·주문 상태 enum·값 타입의 세부와 연동의 실현(..|&gt;)은 읽기 쉽도록 생략했다. 실현은 "05. 구조적 경계와 의존성"의 「17. 코드와 검사」의 「패키지와 코드」가 보였다.</a:t>
+              <a:t>환불·주문 상태 enum·값 타입의 세부와 연동의 실현(..|&gt;)은 읽기 쉽도록 생략했다. 실현은 "세션 05. 구조적 경계와 의존성"의 「17. 코드와 검사」의 「패키지와 코드」가 보였다.</a:t>
             </a:r>
           </a:p>
           <a:p>
@@ -1935,7 +1935,7 @@
             <a:pPr lvl="0"/>
             <a:r>
               <a:rPr lang="ko-KR" sz="1200"/>
-              <a:t>결과를 먼저 예측하게 한다: 주문 서비스를 거쳐도 요청의 순서는 "04. 동적 모델 — 상호작용과 상태"의 테스트와 같은가?</a:t>
+              <a:t>결과를 먼저 예측하게 한다: 주문 서비스를 거쳐도 요청의 순서는 "세션 04. 동적 모델 — 상호작용과 상태"의 테스트와 같은가?</a:t>
             </a:r>
           </a:p>
           <a:p>
@@ -2010,7 +2010,7 @@
             <a:pPr lvl="0"/>
             <a:r>
               <a:rPr lang="ko-KR" sz="1200"/>
-              <a:t>입력의 출처 — "03. 정적 모델 — 도메인 개념과 관계"의 「14. 도메인 모델 작성」의 「상세화」, "04. 동적 모델 — 상호작용과 상태"의 「06. 시퀀스 다이어그램」·「08. 상태 기계 다이어그램」, "05. 구조적 경계와 의존성"의 「12. 안정성과 추상성」·「16. 구조적 제약」.</a:t>
+              <a:t>입력의 출처 — "세션 03. 정적 모델 — 도메인 개념과 관계"의 「14. 도메인 모델 작성」의 「상세화」, "세션 04. 동적 모델 — 상호작용과 상태"의 「06. 시퀀스 다이어그램」·「08. 상태 기계 다이어그램」, "세션 05. 구조적 경계와 의존성"의 「12. 안정성과 추상성」·「16. 구조적 제약」.</a:t>
             </a:r>
           </a:p>
           <a:p>
@@ -2146,7 +2146,7 @@
             <a:pPr lvl="0"/>
             <a:r>
               <a:rPr lang="ko-KR" sz="1200"/>
-              <a:t>인용 근거: Craig Larman, *Applying UML and Patterns*, 3rd ed.(2004), §9.5 "Method 3: Finding Conceptual Classes with Noun Phrase Identification" 원문 확인. "03. 정적 모델 — 도메인 개념과 관계"의 「14. 도메인 모델 작성」의 「초안」 앞의 개념 찾기와 같은 절의 다른 문장이다.</a:t>
+              <a:t>인용 근거: Craig Larman, *Applying UML and Patterns*, 3rd ed.(2004), §9.5 "Method 3: Finding Conceptual Classes with Noun Phrase Identification" 원문 확인. "세션 03. 정적 모델 — 도메인 개념과 관계"의 「14. 도메인 모델 작성」의 「초안」 앞의 개념 찾기와 같은 절의 다른 문장이다.</a:t>
             </a:r>
           </a:p>
           <a:p>
@@ -2221,7 +2221,7 @@
             <a:pPr lvl="0"/>
             <a:r>
               <a:rPr lang="ko-KR" sz="1200"/>
-              <a:t>이 관행에는 "빈약한 도메인 모델(Anemic Domain Model)"이라는 이름이 있다. 원인과 책임 배치로 푸는 방법은 "07. 책임·협력·계약"에서 다룬다.</a:t>
+              <a:t>이 관행에는 "빈약한 도메인 모델(Anemic Domain Model)"이라는 이름이 있다. 원인과 책임 배치로 푸는 방법은 "세션 07. 책임·협력·계약"에서 다룬다.</a:t>
             </a:r>
           </a:p>
           <a:p>
@@ -2364,7 +2364,7 @@
             <a:pPr lvl="0"/>
             <a:r>
               <a:rPr lang="ko-KR" sz="1200"/>
-              <a:t>기술 제약에 적응하면서 의미를 지키는 방법(도메인 모델과 영속 모델의 분리, 매핑의 의미 손실 검토)은 "10. 기술 제약과 도메인 의미 보존"에서 다룬다.</a:t>
+              <a:t>기술 제약에 적응하면서 의미를 지키는 방법(도메인 모델과 영속 모델의 분리, 매핑의 의미 손실 검토)은 "세션 10. 기술 제약과 도메인 의미 보존"에서 다룬다.</a:t>
             </a:r>
           </a:p>
         </p:txBody>
@@ -2432,7 +2432,7 @@
             <a:pPr lvl="0"/>
             <a:r>
               <a:rPr lang="ko-KR" sz="1200"/>
-              <a:t>KISS·DRY·YAGNI는 과정의 기본 원칙이다. 설계에서 이 원칙을 가장 자주 어기는 곳이 "미리 만든 추상화"다. 변이 설계의 판단은 "08. 변화 대응과 변이 설계"에서 다룬다.</a:t>
+              <a:t>KISS·DRY·YAGNI는 과정의 기본 원칙이다. 설계에서 이 원칙을 가장 자주 어기는 곳이 "미리 만든 추상화"다. 변이 설계의 판단은 "세션 08. 변화 대응과 변이 설계"에서 다룬다.</a:t>
             </a:r>
           </a:p>
         </p:txBody>
@@ -3018,7 +3018,7 @@
             <a:pPr lvl="0"/>
             <a:r>
               <a:rPr lang="ko-KR" sz="1200"/>
-              <a:t>도메인 모델에 오퍼레이션을 두지 않는 것은 "03. 정적 모델 — 도메인 개념과 관계"의 원칙이다. 설계 모델에서 처음으로 메서드가 나타난다.</a:t>
+              <a:t>도메인 모델에 오퍼레이션을 두지 않는 것은 "세션 03. 정적 모델 — 도메인 개념과 관계"의 원칙이다. 설계 모델에서 처음으로 메서드가 나타난다.</a:t>
             </a:r>
           </a:p>
           <a:p>
@@ -3318,14 +3318,14 @@
             <a:pPr lvl="0"/>
             <a:r>
               <a:rPr lang="ko-KR" sz="1200"/>
-              <a:t>주문 서비스(OrderService)와 주문 저장소(OrderRepository)는 새 설계 용어다. 용어집과 과정의 공통 전제에 더한다. 설계 도식과 코드는 "05. 구조적 경계와 의존성"의 「05. 설계의 이름」대로 용어집의 영문명을 쓴다.</a:t>
+              <a:t>주문 서비스(OrderService)와 주문 저장소(OrderRepository)는 새 설계 용어다. 용어집과 과정의 공통 전제에 더한다. 설계 도식과 코드는 "세션 05. 구조적 경계와 의존성"의 「05. 설계의 이름」대로 용어집의 영문명을 쓴다.</a:t>
             </a:r>
           </a:p>
           <a:p>
             <a:pPr lvl="0"/>
             <a:r>
               <a:rPr lang="ko-KR" sz="1200"/>
-              <a:t>저장소는 인터페이스(약속)로만 둔다. 데이터베이스·ORM 같은 저장 기술은 "10. 기술 제약과 도메인 의미 보존"에서 다룬다.</a:t>
+              <a:t>저장소는 인터페이스(약속)로만 둔다. 데이터베이스·ORM 같은 저장 기술은 "세션 10. 기술 제약과 도메인 의미 보존"에서 다룬다.</a:t>
             </a:r>
           </a:p>
           <a:p>
@@ -6384,7 +6384,7 @@
           </p:nvPr>
         </p:nvGraphicFramePr>
         <p:xfrm>
-          <a:off x="1495616" y="3461271"/>
+          <a:off x="1495616" y="3558833"/>
           <a:ext cx="6139180" cy="3873500"/>
         </p:xfrm>
         <a:graphic>
@@ -7447,7 +7447,7 @@
         </p:blipFill>
         <p:spPr>
           <a:xfrm>
-            <a:off x="3278109" y="1842998"/>
+            <a:off x="3278109" y="1813560"/>
             <a:ext cx="2574192" cy="1516673"/>
           </a:xfrm>
           <a:prstGeom prst="rect">
@@ -7926,7 +7926,7 @@
           </p:nvPr>
         </p:nvGraphicFramePr>
         <p:xfrm>
-          <a:off x="1481646" y="4325672"/>
+          <a:off x="1481646" y="4452672"/>
           <a:ext cx="6167120" cy="3873500"/>
         </p:xfrm>
         <a:graphic>
@@ -9087,7 +9087,7 @@
         </p:nvSpPr>
         <p:spPr>
           <a:xfrm>
-            <a:off x="365760" y="4608315"/>
+            <a:off x="365760" y="4735315"/>
             <a:ext cx="8412480" cy="781278"/>
           </a:xfrm>
           <a:prstGeom prst="rect">
@@ -9368,7 +9368,7 @@
           </p:nvPr>
         </p:nvGraphicFramePr>
         <p:xfrm>
-          <a:off x="1203516" y="1842998"/>
+          <a:off x="1203516" y="1813560"/>
           <a:ext cx="6723380" cy="3873500"/>
         </p:xfrm>
         <a:graphic>
@@ -10597,7 +10597,7 @@
         </p:nvSpPr>
         <p:spPr>
           <a:xfrm>
-            <a:off x="365760" y="3672598"/>
+            <a:off x="365760" y="3770160"/>
             <a:ext cx="8412480" cy="781278"/>
           </a:xfrm>
           <a:prstGeom prst="rect">
@@ -11298,7 +11298,7 @@
           </p:nvPr>
         </p:nvGraphicFramePr>
         <p:xfrm>
-          <a:off x="412306" y="1842998"/>
+          <a:off x="412306" y="1813560"/>
           <a:ext cx="8305800" cy="3873500"/>
         </p:xfrm>
         <a:graphic>
@@ -13354,7 +13354,7 @@
           </p:nvPr>
         </p:nvGraphicFramePr>
         <p:xfrm>
-          <a:off x="685355" y="1842998"/>
+          <a:off x="685355" y="1813560"/>
           <a:ext cx="7759700" cy="3873500"/>
         </p:xfrm>
         <a:graphic>
@@ -14886,7 +14886,7 @@
           </p:nvPr>
         </p:nvGraphicFramePr>
         <p:xfrm>
-          <a:off x="699326" y="1842998"/>
+          <a:off x="699326" y="1813560"/>
           <a:ext cx="7731760" cy="3873500"/>
         </p:xfrm>
         <a:graphic>
@@ -16451,7 +16451,7 @@
         </p:nvSpPr>
         <p:spPr>
           <a:xfrm>
-            <a:off x="365760" y="4248598"/>
+            <a:off x="365760" y="4346160"/>
             <a:ext cx="8412480" cy="781278"/>
           </a:xfrm>
           <a:prstGeom prst="rect">
@@ -17762,7 +17762,7 @@
           </p:nvPr>
         </p:nvGraphicFramePr>
         <p:xfrm>
-          <a:off x="769176" y="1842998"/>
+          <a:off x="769176" y="1813560"/>
           <a:ext cx="7592060" cy="3873500"/>
         </p:xfrm>
         <a:graphic>
@@ -18823,7 +18823,7 @@
         </p:nvSpPr>
         <p:spPr>
           <a:xfrm>
-            <a:off x="365760" y="3384598"/>
+            <a:off x="365760" y="3482160"/>
             <a:ext cx="8412480" cy="524240"/>
           </a:xfrm>
           <a:prstGeom prst="rect">
@@ -19657,7 +19657,7 @@
           </p:nvPr>
         </p:nvGraphicFramePr>
         <p:xfrm>
-          <a:off x="2164906" y="4101751"/>
+          <a:off x="2164906" y="4216595"/>
           <a:ext cx="4800600" cy="3873500"/>
         </p:xfrm>
         <a:graphic>
@@ -20353,7 +20353,7 @@
         </p:blipFill>
         <p:spPr>
           <a:xfrm>
-            <a:off x="1810282" y="2100036"/>
+            <a:off x="1810282" y="2087880"/>
             <a:ext cx="5509846" cy="1900115"/>
           </a:xfrm>
           <a:prstGeom prst="rect">
@@ -20542,7 +20542,7 @@
           </p:nvPr>
         </p:nvGraphicFramePr>
         <p:xfrm>
-          <a:off x="1077786" y="4938867"/>
+          <a:off x="1077786" y="4737002"/>
           <a:ext cx="6974840" cy="3873500"/>
         </p:xfrm>
         <a:graphic>
@@ -21696,8 +21696,8 @@
         </p:blipFill>
         <p:spPr>
           <a:xfrm>
-            <a:off x="735667" y="1842998"/>
-            <a:ext cx="7659077" cy="2994269"/>
+            <a:off x="1118621" y="1813560"/>
+            <a:ext cx="6893169" cy="2694842"/>
           </a:xfrm>
           <a:prstGeom prst="rect">
             <a:avLst/>
@@ -21995,7 +21995,7 @@
         </p:blipFill>
         <p:spPr>
           <a:xfrm>
-            <a:off x="2606919" y="1924332"/>
+            <a:off x="2606919" y="1813560"/>
             <a:ext cx="3930162" cy="4343400"/>
           </a:xfrm>
           <a:prstGeom prst="rect">
@@ -23181,7 +23181,7 @@
           </p:nvPr>
         </p:nvGraphicFramePr>
         <p:xfrm>
-          <a:off x="1564195" y="5145593"/>
+          <a:off x="1564195" y="5260438"/>
           <a:ext cx="6002020" cy="3873500"/>
         </p:xfrm>
         <a:graphic>
@@ -23845,7 +23845,7 @@
         </p:blipFill>
         <p:spPr>
           <a:xfrm>
-            <a:off x="968175" y="2100036"/>
+            <a:off x="968175" y="2087880"/>
             <a:ext cx="7194062" cy="2943958"/>
           </a:xfrm>
           <a:prstGeom prst="rect">
@@ -24212,7 +24212,7 @@
         </p:blipFill>
         <p:spPr>
           <a:xfrm>
-            <a:off x="729639" y="2430012"/>
+            <a:off x="729639" y="1813560"/>
             <a:ext cx="7684721" cy="3332040"/>
           </a:xfrm>
           <a:prstGeom prst="rect">
@@ -26476,7 +26476,7 @@
         </p:blipFill>
         <p:spPr>
           <a:xfrm>
-            <a:off x="1907381" y="3628196"/>
+            <a:off x="1907381" y="3063240"/>
             <a:ext cx="5329238" cy="2500313"/>
           </a:xfrm>
           <a:prstGeom prst="rect">
@@ -26653,8 +26653,8 @@
           </p:nvPr>
         </p:nvGraphicFramePr>
         <p:xfrm>
-          <a:off x="1256856" y="1842998"/>
-          <a:ext cx="6616700" cy="3873500"/>
+          <a:off x="1075245" y="1813560"/>
+          <a:ext cx="6979920" cy="3873500"/>
         </p:xfrm>
         <a:graphic>
           <a:graphicData uri="http://schemas.openxmlformats.org/drawingml/2006/table">
@@ -26662,7 +26662,7 @@
               <a:tblPr/>
               <a:tblGrid>
                 <a:gridCol w="3797300"/>
-                <a:gridCol w="2819400"/>
+                <a:gridCol w="3182620"/>
               </a:tblGrid>
               <a:tr h="288000">
                 <a:tc>
@@ -26871,7 +26871,7 @@
                           <a:ea typeface="맑은 고딕" panose="020B0503020000020004" pitchFamily="34" charset="-127"/>
                           <a:cs typeface="맑은 고딕"/>
                         </a:rPr>
-                        <a:t>"07. 책임·협력·계약"</a:t>
+                        <a:t>"세션 07. 책임·협력·계약"</a:t>
                       </a:r>
                     </a:p>
                   </a:txBody>
@@ -26983,7 +26983,7 @@
                           <a:ea typeface="맑은 고딕" panose="020B0503020000020004" pitchFamily="34" charset="-127"/>
                           <a:cs typeface="맑은 고딕"/>
                         </a:rPr>
-                        <a:t>"07. 책임·협력·계약"</a:t>
+                        <a:t>"세션 07. 책임·협력·계약"</a:t>
                       </a:r>
                     </a:p>
                   </a:txBody>
@@ -27095,7 +27095,7 @@
                           <a:ea typeface="맑은 고딕" panose="020B0503020000020004" pitchFamily="34" charset="-127"/>
                           <a:cs typeface="맑은 고딕"/>
                         </a:rPr>
-                        <a:t>"08. 변화 대응과 변이 설계"</a:t>
+                        <a:t>"세션 08. 변화 대응과 변이 설계"</a:t>
                       </a:r>
                     </a:p>
                   </a:txBody>
@@ -27207,7 +27207,7 @@
                           <a:ea typeface="맑은 고딕" panose="020B0503020000020004" pitchFamily="34" charset="-127"/>
                           <a:cs typeface="맑은 고딕"/>
                         </a:rPr>
-                        <a:t>"09. 설계 대안 평가"</a:t>
+                        <a:t>"세션 09. 설계 대안 평가"</a:t>
                       </a:r>
                     </a:p>
                   </a:txBody>
@@ -27319,7 +27319,7 @@
                           <a:ea typeface="맑은 고딕" panose="020B0503020000020004" pitchFamily="34" charset="-127"/>
                           <a:cs typeface="맑은 고딕"/>
                         </a:rPr>
-                        <a:t>"10. 기술 제약과 도메인 의미 보존"</a:t>
+                        <a:t>"세션 10. 기술 제약과 도메인 의미 보존"</a:t>
                       </a:r>
                     </a:p>
                   </a:txBody>
@@ -27686,7 +27686,7 @@
           </p:nvPr>
         </p:nvGraphicFramePr>
         <p:xfrm>
-          <a:off x="1326706" y="2801048"/>
+          <a:off x="1326706" y="2600498"/>
           <a:ext cx="6477000" cy="3873500"/>
         </p:xfrm>
         <a:graphic>
@@ -28298,7 +28298,7 @@
         <p:spPr>
           <a:xfrm>
             <a:off x="365760" y="960120"/>
-            <a:ext cx="8412480" cy="1739328"/>
+            <a:ext cx="8412480" cy="1587442"/>
           </a:xfrm>
           <a:prstGeom prst="rect">
             <a:avLst/>
@@ -28690,7 +28690,7 @@
           </p:nvPr>
         </p:nvGraphicFramePr>
         <p:xfrm>
-          <a:off x="1047306" y="1842998"/>
+          <a:off x="1047306" y="1813560"/>
           <a:ext cx="7035800" cy="3873500"/>
         </p:xfrm>
         <a:graphic>
@@ -29344,7 +29344,7 @@
         </p:nvSpPr>
         <p:spPr>
           <a:xfrm>
-            <a:off x="365760" y="3096598"/>
+            <a:off x="365760" y="3194160"/>
             <a:ext cx="8412480" cy="524240"/>
           </a:xfrm>
           <a:prstGeom prst="rect">
@@ -30091,7 +30091,7 @@
           </p:nvPr>
         </p:nvGraphicFramePr>
         <p:xfrm>
-          <a:off x="1312735" y="1842998"/>
+          <a:off x="1312735" y="1813560"/>
           <a:ext cx="6504940" cy="3873500"/>
         </p:xfrm>
         <a:graphic>
@@ -30837,7 +30837,7 @@
         </p:nvSpPr>
         <p:spPr>
           <a:xfrm>
-            <a:off x="365760" y="3384598"/>
+            <a:off x="365760" y="3482160"/>
             <a:ext cx="8412480" cy="781278"/>
           </a:xfrm>
           <a:prstGeom prst="rect">
@@ -33284,7 +33284,7 @@
           </p:nvPr>
         </p:nvGraphicFramePr>
         <p:xfrm>
-          <a:off x="559626" y="1842998"/>
+          <a:off x="559626" y="1813560"/>
           <a:ext cx="8011160" cy="3873500"/>
         </p:xfrm>
         <a:graphic>
@@ -35986,7 +35986,7 @@
         </p:blipFill>
         <p:spPr>
           <a:xfrm>
-            <a:off x="800588" y="1847163"/>
+            <a:off x="800588" y="1539240"/>
             <a:ext cx="7542823" cy="4039821"/>
           </a:xfrm>
           <a:prstGeom prst="rect">
@@ -36163,7 +36163,7 @@
           </p:nvPr>
         </p:nvGraphicFramePr>
         <p:xfrm>
-          <a:off x="1552766" y="2801048"/>
+          <a:off x="1552766" y="2600498"/>
           <a:ext cx="6024880" cy="3873500"/>
         </p:xfrm>
         <a:graphic>
@@ -37070,7 +37070,7 @@
         <p:spPr>
           <a:xfrm>
             <a:off x="365760" y="960120"/>
-            <a:ext cx="8412480" cy="1739328"/>
+            <a:ext cx="8412480" cy="1587442"/>
           </a:xfrm>
           <a:prstGeom prst="rect">
             <a:avLst/>
@@ -37644,7 +37644,7 @@
         </p:blipFill>
         <p:spPr>
           <a:xfrm>
-            <a:off x="506535" y="2468014"/>
+            <a:off x="506535" y="1620462"/>
             <a:ext cx="8130931" cy="3039696"/>
           </a:xfrm>
           <a:prstGeom prst="rect">
@@ -38813,7 +38813,7 @@
           </p:nvPr>
         </p:nvGraphicFramePr>
         <p:xfrm>
-          <a:off x="1467676" y="2100036"/>
+          <a:off x="1467676" y="2087880"/>
           <a:ext cx="6195060" cy="3873500"/>
         </p:xfrm>
         <a:graphic>
@@ -40230,7 +40230,7 @@
         </p:nvSpPr>
         <p:spPr>
           <a:xfrm>
-            <a:off x="365760" y="4217636"/>
+            <a:off x="365760" y="4332480"/>
             <a:ext cx="8412480" cy="781278"/>
           </a:xfrm>
           <a:prstGeom prst="rect">
@@ -41027,7 +41027,7 @@
           </p:nvPr>
         </p:nvGraphicFramePr>
         <p:xfrm>
-          <a:off x="1913446" y="2801048"/>
+          <a:off x="1913446" y="2762596"/>
           <a:ext cx="5303520" cy="3873500"/>
         </p:xfrm>
         <a:graphic>
@@ -41919,7 +41919,7 @@
           </p:nvPr>
         </p:nvGraphicFramePr>
         <p:xfrm>
-          <a:off x="755205" y="1842998"/>
+          <a:off x="755205" y="1813560"/>
           <a:ext cx="7620000" cy="3873500"/>
         </p:xfrm>
         <a:graphic>
@@ -43188,7 +43188,7 @@
         </p:nvSpPr>
         <p:spPr>
           <a:xfrm>
-            <a:off x="365760" y="3672598"/>
+            <a:off x="365760" y="3770160"/>
             <a:ext cx="8412480" cy="781278"/>
           </a:xfrm>
           <a:prstGeom prst="rect">
@@ -43427,7 +43427,7 @@
           </p:nvPr>
         </p:nvGraphicFramePr>
         <p:xfrm>
-          <a:off x="1495616" y="3691443"/>
+          <a:off x="1495616" y="3806288"/>
           <a:ext cx="6139180" cy="3873500"/>
         </p:xfrm>
         <a:graphic>
@@ -44362,7 +44362,7 @@
         </p:blipFill>
         <p:spPr>
           <a:xfrm>
-            <a:off x="1302282" y="2100036"/>
+            <a:off x="1302282" y="2087880"/>
             <a:ext cx="6525846" cy="1489808"/>
           </a:xfrm>
           <a:prstGeom prst="rect">

--- a/courses/ooad/sessions/s06.pptx
+++ b/courses/ooad/sessions/s06.pptx
@@ -32652,7 +32652,7 @@
                 <a:latin typeface="맑은 고딕"/>
                 <a:ea typeface="맑은 고딕"/>
               </a:rPr>
-              <a:t>이 세션은 분석 모델의 </a:t>
+              <a:t>분석의 </a:t>
             </a:r>
             <a:r>
               <a:rPr sz="1800" b="1">
@@ -32692,7 +32692,7 @@
                 <a:latin typeface="맑은 고딕"/>
                 <a:ea typeface="맑은 고딕"/>
               </a:rPr>
-              <a:t>를 만들었다.</a:t>
+              <a:t>를 만든다.</a:t>
             </a:r>
           </a:p>
           <a:p>
@@ -32799,7 +32799,7 @@
                 <a:latin typeface="맑은 고딕"/>
                 <a:ea typeface="맑은 고딕"/>
               </a:rPr>
-              <a:t> 1:1이 아니다. 나뉘고, 합쳐지고, 설계에만 있는 요소가 생긴다</a:t>
+              <a:t> 1:1이 아니다. 나뉘고 합쳐지고 설계에만 있는 것이 생긴다</a:t>
             </a:r>
           </a:p>
           <a:p>
@@ -32842,7 +32842,7 @@
                 <a:latin typeface="맑은 고딕"/>
                 <a:ea typeface="맑은 고딕"/>
               </a:rPr>
-              <a:t> 용어·값·규칙·다중성·계약·사건의 순서를 테스트로 확인한다</a:t>
+              <a:t> 용어·값·규칙·다중성·계약·순서를 테스트로 확인한다</a:t>
             </a:r>
           </a:p>
           <a:p>
@@ -33014,7 +33014,7 @@
                 <a:latin typeface="맑은 고딕"/>
                 <a:ea typeface="맑은 고딕"/>
               </a:rPr>
-              <a:t> 기계적 변환, 데이터만 옮기기, 분석과 단절, 기술 먼저</a:t>
+              <a:t> 기계적 변환, 데이터만 옮기기, 분석과 단절</a:t>
             </a:r>
           </a:p>
           <a:p>

--- a/courses/ooad/sessions/s06.pptx
+++ b/courses/ooad/sessions/s06.pptx
@@ -19187,7 +19187,7 @@
                 <a:latin typeface="맑은 고딕"/>
                 <a:ea typeface="맑은 고딕"/>
               </a:rPr>
-              <a:t>"설계에 쓰는 </a:t>
+              <a:t>설계에 쓰는 </a:t>
             </a:r>
             <a:r>
               <a:rPr sz="1800" b="1">
@@ -19227,7 +19227,7 @@
                 <a:latin typeface="맑은 고딕"/>
                 <a:ea typeface="맑은 고딕"/>
               </a:rPr>
-              <a:t>을 모델에서 가져온다"</a:t>
+              <a:t>을 모델에서 가져온다</a:t>
             </a:r>
             <a:r>
               <a:rPr sz="1000" b="0">
@@ -19247,27 +19247,7 @@
                 <a:latin typeface="맑은 고딕"/>
                 <a:ea typeface="맑은 고딕"/>
               </a:rPr>
-              <a:t>"Draw from the model the terminology used in the design and the basic assignment of responsibilities."</a:t>
-            </a:r>
-            <a:r>
-              <a:rPr sz="1000" b="0">
-                <a:solidFill>
-                  <a:srgbClr val="000000"/>
-                </a:solidFill>
-                <a:latin typeface="맑은 고딕"/>
-                <a:ea typeface="맑은 고딕"/>
-              </a:rPr>
-              <a:t>, </a:t>
-            </a:r>
-            <a:r>
-              <a:rPr sz="1000" b="0">
-                <a:solidFill>
-                  <a:srgbClr val="000000"/>
-                </a:solidFill>
-                <a:latin typeface="맑은 고딕"/>
-                <a:ea typeface="맑은 고딕"/>
-              </a:rPr>
-              <a:t>[Evans 2015]</a:t>
+              <a:t>"Draw from the model the terminology used in the design and the basic assignment of responsibilities.", [Evans 2015]</a:t>
             </a:r>
           </a:p>
           <a:p>
@@ -28391,7 +28371,7 @@
                 <a:latin typeface="맑은 고딕"/>
                 <a:ea typeface="맑은 고딕"/>
               </a:rPr>
-              <a:t>"이 방법은 주의해서 써야 한다. 명사를 </a:t>
+              <a:t>이 방법은 주의해서 써야 한다 — 명사를 </a:t>
             </a:r>
             <a:r>
               <a:rPr sz="1800" b="1">
@@ -28411,7 +28391,7 @@
                 <a:latin typeface="맑은 고딕"/>
                 <a:ea typeface="맑은 고딕"/>
               </a:rPr>
-              <a:t>시킬 수는 없고, 자연어의 단어는 모호하다"</a:t>
+              <a:t>시킬 수는 없고 자연어의 단어는 모호하다</a:t>
             </a:r>
             <a:r>
               <a:rPr sz="1000" b="0">
@@ -28431,27 +28411,7 @@
                 <a:latin typeface="맑은 고딕"/>
                 <a:ea typeface="맑은 고딕"/>
               </a:rPr>
-              <a:t>"Care must be applied with this method; a mechanical noun-to-class mapping isn’t possible, and words in natural languages are ambiguous."</a:t>
-            </a:r>
-            <a:r>
-              <a:rPr sz="1000" b="0">
-                <a:solidFill>
-                  <a:srgbClr val="000000"/>
-                </a:solidFill>
-                <a:latin typeface="맑은 고딕"/>
-                <a:ea typeface="맑은 고딕"/>
-              </a:rPr>
-              <a:t>, </a:t>
-            </a:r>
-            <a:r>
-              <a:rPr sz="1000" b="0">
-                <a:solidFill>
-                  <a:srgbClr val="000000"/>
-                </a:solidFill>
-                <a:latin typeface="맑은 고딕"/>
-                <a:ea typeface="맑은 고딕"/>
-              </a:rPr>
-              <a:t>[Larman 2004]</a:t>
+              <a:t>"Care must be applied with this method; a mechanical noun-to-class mapping isn’t possible, and words in natural languages are ambiguous.", [Larman 2004]</a:t>
             </a:r>
           </a:p>
         </p:txBody>
@@ -37183,7 +37143,7 @@
                 <a:latin typeface="맑은 고딕"/>
                 <a:ea typeface="맑은 고딕"/>
               </a:rPr>
-              <a:t>"소프트웨어 개발의 핵심 설계 도구는 </a:t>
+              <a:t>소프트웨어 개발의 핵심 설계 도구는 </a:t>
             </a:r>
             <a:r>
               <a:rPr sz="1800" b="1">
@@ -37203,7 +37163,7 @@
                 <a:latin typeface="맑은 고딕"/>
                 <a:ea typeface="맑은 고딕"/>
               </a:rPr>
-              <a:t>이며, UML이나 다른 어떤 기술도 아니다"</a:t>
+              <a:t>이며 UML이나 다른 어떤 기술도 아니다</a:t>
             </a:r>
             <a:r>
               <a:rPr sz="1000" b="0">
@@ -37223,27 +37183,7 @@
                 <a:latin typeface="맑은 고딕"/>
                 <a:ea typeface="맑은 고딕"/>
               </a:rPr>
-              <a:t>"The critical design tool for software development is a mind well educated in design principles. It is not the UML or any other technology."</a:t>
-            </a:r>
-            <a:r>
-              <a:rPr sz="1000" b="0">
-                <a:solidFill>
-                  <a:srgbClr val="000000"/>
-                </a:solidFill>
-                <a:latin typeface="맑은 고딕"/>
-                <a:ea typeface="맑은 고딕"/>
-              </a:rPr>
-              <a:t>, </a:t>
-            </a:r>
-            <a:r>
-              <a:rPr sz="1000" b="0">
-                <a:solidFill>
-                  <a:srgbClr val="000000"/>
-                </a:solidFill>
-                <a:latin typeface="맑은 고딕"/>
-                <a:ea typeface="맑은 고딕"/>
-              </a:rPr>
-              <a:t>[Larman 2004]</a:t>
+              <a:t>"The critical design tool for software development is a mind well educated in design principles. It is not the UML or any other technology.", [Larman 2004]</a:t>
             </a:r>
           </a:p>
         </p:txBody>
@@ -40594,7 +40534,7 @@
                 <a:latin typeface="맑은 고딕"/>
                 <a:ea typeface="맑은 고딕"/>
               </a:rPr>
-              <a:t>"도메인 계층의 소프트웨어 클래스 이름은 </a:t>
+              <a:t>도메인 계층의 소프트웨어 클래스 이름은 </a:t>
             </a:r>
             <a:r>
               <a:rPr sz="1800" b="1">
@@ -40614,7 +40554,7 @@
                 <a:latin typeface="맑은 고딕"/>
                 <a:ea typeface="맑은 고딕"/>
               </a:rPr>
-              <a:t>을 얻고, 객체는 도메인에 익숙한 정보와 책임을 갖게 한다"</a:t>
+              <a:t>을 얻고 객체는 도메인에 익숙한 정보와 책임을 갖게 한다</a:t>
             </a:r>
             <a:r>
               <a:rPr sz="1000" b="0">
@@ -40634,27 +40574,7 @@
                 <a:latin typeface="맑은 고딕"/>
                 <a:ea typeface="맑은 고딕"/>
               </a:rPr>
-              <a:t>"Use software class names in the domain layer inspired from names in the domain model, with objects having domain-familiar information and responsibilities."</a:t>
-            </a:r>
-            <a:r>
-              <a:rPr sz="1000" b="0">
-                <a:solidFill>
-                  <a:srgbClr val="000000"/>
-                </a:solidFill>
-                <a:latin typeface="맑은 고딕"/>
-                <a:ea typeface="맑은 고딕"/>
-              </a:rPr>
-              <a:t>, </a:t>
-            </a:r>
-            <a:r>
-              <a:rPr sz="1000" b="0">
-                <a:solidFill>
-                  <a:srgbClr val="000000"/>
-                </a:solidFill>
-                <a:latin typeface="맑은 고딕"/>
-                <a:ea typeface="맑은 고딕"/>
-              </a:rPr>
-              <a:t>[Larman 2004]</a:t>
+              <a:t>"Use software class names in the domain layer inspired from names in the domain model, with objects having domain-familiar information and responsibilities.", [Larman 2004]</a:t>
             </a:r>
           </a:p>
           <a:p>
@@ -40677,7 +40597,7 @@
                 <a:latin typeface="맑은 고딕"/>
                 <a:ea typeface="맑은 고딕"/>
               </a:rPr>
-              <a:t>"표현 간극을 줄이는 것은 유용하지만, </a:t>
+              <a:t>표현 간극을 줄이는 것은 유용하지만 </a:t>
             </a:r>
             <a:r>
               <a:rPr sz="1800" b="1">
@@ -40697,7 +40617,7 @@
                 <a:latin typeface="맑은 고딕"/>
                 <a:ea typeface="맑은 고딕"/>
               </a:rPr>
-              <a:t> 하고 복잡성을 관리·은닉하는 객체의 장점에 비하면 부차적이다"</a:t>
+              <a:t> 하고 복잡성을 관리·은닉하는 객체의 장점에 비하면 부차적이다</a:t>
             </a:r>
             <a:r>
               <a:rPr sz="1000" b="0">
@@ -40717,27 +40637,7 @@
                 <a:latin typeface="맑은 고딕"/>
                 <a:ea typeface="맑은 고딕"/>
               </a:rPr>
-              <a:t>"A lowered representational gap is useful, but arguably secondary to the advantage objects have in supporting ease of change and extension, and managing and hiding complexity."</a:t>
-            </a:r>
-            <a:r>
-              <a:rPr sz="1000" b="0">
-                <a:solidFill>
-                  <a:srgbClr val="000000"/>
-                </a:solidFill>
-                <a:latin typeface="맑은 고딕"/>
-                <a:ea typeface="맑은 고딕"/>
-              </a:rPr>
-              <a:t>, </a:t>
-            </a:r>
-            <a:r>
-              <a:rPr sz="1000" b="0">
-                <a:solidFill>
-                  <a:srgbClr val="000000"/>
-                </a:solidFill>
-                <a:latin typeface="맑은 고딕"/>
-                <a:ea typeface="맑은 고딕"/>
-              </a:rPr>
-              <a:t>[Larman 2004]</a:t>
+              <a:t>"A lowered representational gap is useful, but arguably secondary to the advantage objects have in supporting ease of change and extension, and managing and hiding complexity.", [Larman 2004]</a:t>
             </a:r>
           </a:p>
           <a:p>
@@ -41620,7 +41520,7 @@
                 <a:latin typeface="맑은 고딕"/>
                 <a:ea typeface="맑은 고딕"/>
               </a:rPr>
-              <a:t>"설계나 그 핵심이 도메인 모델에 </a:t>
+              <a:t>설계나 그 핵심이 도메인 모델에 </a:t>
             </a:r>
             <a:r>
               <a:rPr sz="1800" b="1">
@@ -41640,7 +41540,7 @@
                 <a:latin typeface="맑은 고딕"/>
                 <a:ea typeface="맑은 고딕"/>
               </a:rPr>
-              <a:t> 그 모델은 가치가 거의 없고, 소프트웨어의 정확성도 의심스럽다"</a:t>
+              <a:t> 그 모델은 가치가 거의 없고 소프트웨어의 정확성도 의심스럽다</a:t>
             </a:r>
             <a:r>
               <a:rPr sz="1000" b="0">
@@ -41660,27 +41560,7 @@
                 <a:latin typeface="맑은 고딕"/>
                 <a:ea typeface="맑은 고딕"/>
               </a:rPr>
-              <a:t>"If the design, or some central part of it, does not map to the domain model, that model is of little value, and the correctness of the software is suspect."</a:t>
-            </a:r>
-            <a:r>
-              <a:rPr sz="1000" b="0">
-                <a:solidFill>
-                  <a:srgbClr val="000000"/>
-                </a:solidFill>
-                <a:latin typeface="맑은 고딕"/>
-                <a:ea typeface="맑은 고딕"/>
-              </a:rPr>
-              <a:t>, </a:t>
-            </a:r>
-            <a:r>
-              <a:rPr sz="1000" b="0">
-                <a:solidFill>
-                  <a:srgbClr val="000000"/>
-                </a:solidFill>
-                <a:latin typeface="맑은 고딕"/>
-                <a:ea typeface="맑은 고딕"/>
-              </a:rPr>
-              <a:t>[Evans 2015]</a:t>
+              <a:t>"If the design, or some central part of it, does not map to the domain model, that model is of little value, and the correctness of the software is suspect.", [Evans 2015]</a:t>
             </a:r>
           </a:p>
         </p:txBody>

--- a/courses/ooad/sessions/s06.pptx
+++ b/courses/ooad/sessions/s06.pptx
@@ -19247,7 +19247,27 @@
                 <a:latin typeface="맑은 고딕"/>
                 <a:ea typeface="맑은 고딕"/>
               </a:rPr>
-              <a:t>"Draw from the model the terminology used in the design and the basic assignment of responsibilities.", [Evans 2015]</a:t>
+              <a:t>"Draw from the model the terminology used in the design and the basic assignment of responsibilities."</a:t>
+            </a:r>
+            <a:r>
+              <a:rPr sz="1000" b="0">
+                <a:solidFill>
+                  <a:srgbClr val="000000"/>
+                </a:solidFill>
+                <a:latin typeface="맑은 고딕"/>
+                <a:ea typeface="맑은 고딕"/>
+              </a:rPr>
+              <a:t>, </a:t>
+            </a:r>
+            <a:r>
+              <a:rPr sz="1000" b="0">
+                <a:solidFill>
+                  <a:srgbClr val="000000"/>
+                </a:solidFill>
+                <a:latin typeface="맑은 고딕"/>
+                <a:ea typeface="맑은 고딕"/>
+              </a:rPr>
+              <a:t>[Evans 2015]</a:t>
             </a:r>
           </a:p>
           <a:p>
@@ -28411,7 +28431,27 @@
                 <a:latin typeface="맑은 고딕"/>
                 <a:ea typeface="맑은 고딕"/>
               </a:rPr>
-              <a:t>"Care must be applied with this method; a mechanical noun-to-class mapping isn’t possible, and words in natural languages are ambiguous.", [Larman 2004]</a:t>
+              <a:t>"Care must be applied with this method; a mechanical noun-to-class mapping isn’t possible, and words in natural languages are ambiguous."</a:t>
+            </a:r>
+            <a:r>
+              <a:rPr sz="1000" b="0">
+                <a:solidFill>
+                  <a:srgbClr val="000000"/>
+                </a:solidFill>
+                <a:latin typeface="맑은 고딕"/>
+                <a:ea typeface="맑은 고딕"/>
+              </a:rPr>
+              <a:t>, </a:t>
+            </a:r>
+            <a:r>
+              <a:rPr sz="1000" b="0">
+                <a:solidFill>
+                  <a:srgbClr val="000000"/>
+                </a:solidFill>
+                <a:latin typeface="맑은 고딕"/>
+                <a:ea typeface="맑은 고딕"/>
+              </a:rPr>
+              <a:t>[Larman 2004]</a:t>
             </a:r>
           </a:p>
         </p:txBody>
@@ -37183,7 +37223,27 @@
                 <a:latin typeface="맑은 고딕"/>
                 <a:ea typeface="맑은 고딕"/>
               </a:rPr>
-              <a:t>"The critical design tool for software development is a mind well educated in design principles. It is not the UML or any other technology.", [Larman 2004]</a:t>
+              <a:t>"The critical design tool for software development is a mind well educated in design principles. It is not the UML or any other technology."</a:t>
+            </a:r>
+            <a:r>
+              <a:rPr sz="1000" b="0">
+                <a:solidFill>
+                  <a:srgbClr val="000000"/>
+                </a:solidFill>
+                <a:latin typeface="맑은 고딕"/>
+                <a:ea typeface="맑은 고딕"/>
+              </a:rPr>
+              <a:t>, </a:t>
+            </a:r>
+            <a:r>
+              <a:rPr sz="1000" b="0">
+                <a:solidFill>
+                  <a:srgbClr val="000000"/>
+                </a:solidFill>
+                <a:latin typeface="맑은 고딕"/>
+                <a:ea typeface="맑은 고딕"/>
+              </a:rPr>
+              <a:t>[Larman 2004]</a:t>
             </a:r>
           </a:p>
         </p:txBody>
@@ -40574,7 +40634,27 @@
                 <a:latin typeface="맑은 고딕"/>
                 <a:ea typeface="맑은 고딕"/>
               </a:rPr>
-              <a:t>"Use software class names in the domain layer inspired from names in the domain model, with objects having domain-familiar information and responsibilities.", [Larman 2004]</a:t>
+              <a:t>"Use software class names in the domain layer inspired from names in the domain model, with objects having domain-familiar information and responsibilities."</a:t>
+            </a:r>
+            <a:r>
+              <a:rPr sz="1000" b="0">
+                <a:solidFill>
+                  <a:srgbClr val="000000"/>
+                </a:solidFill>
+                <a:latin typeface="맑은 고딕"/>
+                <a:ea typeface="맑은 고딕"/>
+              </a:rPr>
+              <a:t>, </a:t>
+            </a:r>
+            <a:r>
+              <a:rPr sz="1000" b="0">
+                <a:solidFill>
+                  <a:srgbClr val="000000"/>
+                </a:solidFill>
+                <a:latin typeface="맑은 고딕"/>
+                <a:ea typeface="맑은 고딕"/>
+              </a:rPr>
+              <a:t>[Larman 2004]</a:t>
             </a:r>
           </a:p>
           <a:p>
@@ -40637,7 +40717,27 @@
                 <a:latin typeface="맑은 고딕"/>
                 <a:ea typeface="맑은 고딕"/>
               </a:rPr>
-              <a:t>"A lowered representational gap is useful, but arguably secondary to the advantage objects have in supporting ease of change and extension, and managing and hiding complexity.", [Larman 2004]</a:t>
+              <a:t>"A lowered representational gap is useful, but arguably secondary to the advantage objects have in supporting ease of change and extension, and managing and hiding complexity."</a:t>
+            </a:r>
+            <a:r>
+              <a:rPr sz="1000" b="0">
+                <a:solidFill>
+                  <a:srgbClr val="000000"/>
+                </a:solidFill>
+                <a:latin typeface="맑은 고딕"/>
+                <a:ea typeface="맑은 고딕"/>
+              </a:rPr>
+              <a:t>, </a:t>
+            </a:r>
+            <a:r>
+              <a:rPr sz="1000" b="0">
+                <a:solidFill>
+                  <a:srgbClr val="000000"/>
+                </a:solidFill>
+                <a:latin typeface="맑은 고딕"/>
+                <a:ea typeface="맑은 고딕"/>
+              </a:rPr>
+              <a:t>[Larman 2004]</a:t>
             </a:r>
           </a:p>
           <a:p>
@@ -41560,7 +41660,27 @@
                 <a:latin typeface="맑은 고딕"/>
                 <a:ea typeface="맑은 고딕"/>
               </a:rPr>
-              <a:t>"If the design, or some central part of it, does not map to the domain model, that model is of little value, and the correctness of the software is suspect.", [Evans 2015]</a:t>
+              <a:t>"If the design, or some central part of it, does not map to the domain model, that model is of little value, and the correctness of the software is suspect."</a:t>
+            </a:r>
+            <a:r>
+              <a:rPr sz="1000" b="0">
+                <a:solidFill>
+                  <a:srgbClr val="000000"/>
+                </a:solidFill>
+                <a:latin typeface="맑은 고딕"/>
+                <a:ea typeface="맑은 고딕"/>
+              </a:rPr>
+              <a:t>, </a:t>
+            </a:r>
+            <a:r>
+              <a:rPr sz="1000" b="0">
+                <a:solidFill>
+                  <a:srgbClr val="000000"/>
+                </a:solidFill>
+                <a:latin typeface="맑은 고딕"/>
+                <a:ea typeface="맑은 고딕"/>
+              </a:rPr>
+              <a:t>[Evans 2015]</a:t>
             </a:r>
           </a:p>
         </p:txBody>
